--- a/Documents/Sustentacion.pptx
+++ b/Documents/Sustentacion.pptx
@@ -3339,7 +3339,7 @@
                 </a:solidFill>
                 <a:latin typeface="Calibri"/>
               </a:rPr>
-              <a:t>Carlos David Moreno  ·  Mayo 2026</a:t>
+              <a:t>Carlos Alberto Moreno David · Juan Esteban García Ocampo · Emiliano Vélez Suárez · Sebastián Ciro Medellín  ·  Mayo 2026</a:t>
             </a:r>
           </a:p>
         </p:txBody>
@@ -10722,7 +10722,7 @@
                 </a:solidFill>
                 <a:latin typeface="Calibri"/>
               </a:rPr>
-              <a:t>Carlos David Moreno · admmoreno.david@gmail.com · Mayo 2026</a:t>
+              <a:t>Carlos Alberto Moreno David · Juan Esteban García Ocampo · Emiliano Vélez Suárez · Sebastián Ciro Medellín · admmoreno.david@gmail.com · Mayo 2026</a:t>
             </a:r>
           </a:p>
         </p:txBody>

--- a/Documents/Sustentacion.pptx
+++ b/Documents/Sustentacion.pptx
@@ -5,25 +5,25 @@
     <p:sldMasterId id="2147483648" r:id="rId1"/>
   </p:sldMasterIdLst>
   <p:sldIdLst>
-    <p:sldId id="256" r:id="rId7"/>
-    <p:sldId id="257" r:id="rId8"/>
-    <p:sldId id="258" r:id="rId9"/>
-    <p:sldId id="259" r:id="rId10"/>
-    <p:sldId id="260" r:id="rId11"/>
-    <p:sldId id="261" r:id="rId12"/>
-    <p:sldId id="262" r:id="rId13"/>
-    <p:sldId id="263" r:id="rId14"/>
-    <p:sldId id="264" r:id="rId15"/>
-    <p:sldId id="265" r:id="rId16"/>
-    <p:sldId id="266" r:id="rId17"/>
-    <p:sldId id="267" r:id="rId18"/>
-    <p:sldId id="268" r:id="rId19"/>
-    <p:sldId id="269" r:id="rId20"/>
-    <p:sldId id="270" r:id="rId21"/>
-    <p:sldId id="271" r:id="rId22"/>
-    <p:sldId id="272" r:id="rId23"/>
+    <p:sldId id="256" r:id="rId2"/>
+    <p:sldId id="257" r:id="rId3"/>
+    <p:sldId id="258" r:id="rId4"/>
+    <p:sldId id="259" r:id="rId5"/>
+    <p:sldId id="260" r:id="rId6"/>
+    <p:sldId id="261" r:id="rId7"/>
+    <p:sldId id="262" r:id="rId8"/>
+    <p:sldId id="263" r:id="rId9"/>
+    <p:sldId id="264" r:id="rId10"/>
+    <p:sldId id="265" r:id="rId11"/>
+    <p:sldId id="266" r:id="rId12"/>
+    <p:sldId id="267" r:id="rId13"/>
+    <p:sldId id="268" r:id="rId14"/>
+    <p:sldId id="269" r:id="rId15"/>
+    <p:sldId id="270" r:id="rId16"/>
+    <p:sldId id="271" r:id="rId17"/>
+    <p:sldId id="272" r:id="rId18"/>
   </p:sldIdLst>
-  <p:sldSz cx="12188952" cy="6858000" type="screen4x3"/>
+  <p:sldSz cx="12188825" cy="6858000"/>
   <p:notesSz cx="6858000" cy="9144000"/>
   <p:defaultTextStyle>
     <a:defPPr>
@@ -120,6 +120,22 @@
       </a:defRPr>
     </a:lvl9pPr>
   </p:defaultTextStyle>
+  <p:extLst>
+    <p:ext uri="{EFAFB233-063F-42B5-8137-9DF3F51BA10A}">
+      <p15:sldGuideLst xmlns:p15="http://schemas.microsoft.com/office/powerpoint/2012/main">
+        <p15:guide id="1" orient="horz" pos="2160">
+          <p15:clr>
+            <a:srgbClr val="A4A3A4"/>
+          </p15:clr>
+        </p15:guide>
+        <p15:guide id="2" pos="2880">
+          <p15:clr>
+            <a:srgbClr val="A4A3A4"/>
+          </p15:clr>
+        </p15:guide>
+      </p15:sldGuideLst>
+    </p:ext>
+  </p:extLst>
 </p:presentation>
 </file>
 
@@ -161,10 +177,9 @@
           <a:lstStyle/>
           <a:p>
             <a:r>
-              <a:rPr lang="en-US" smtClean="0"/>
+              <a:rPr lang="en-US"/>
               <a:t>Click to edit Master title style</a:t>
             </a:r>
-            <a:endParaRPr lang="en-US"/>
           </a:p>
         </p:txBody>
       </p:sp>
@@ -280,10 +295,9 @@
           </a:lstStyle>
           <a:p>
             <a:r>
-              <a:rPr lang="en-US" smtClean="0"/>
+              <a:rPr lang="en-US"/>
               <a:t>Click to edit Master subtitle style</a:t>
             </a:r>
-            <a:endParaRPr lang="en-US"/>
           </a:p>
         </p:txBody>
       </p:sp>
@@ -304,7 +318,7 @@
           <a:p>
             <a:fld id="{5BCAD085-E8A6-8845-BD4E-CB4CCA059FC4}" type="datetimeFigureOut">
               <a:rPr lang="en-US" smtClean="0"/>
-              <a:t>1/27/13</a:t>
+              <a:t>5/18/2026</a:t>
             </a:fld>
             <a:endParaRPr lang="en-US"/>
           </a:p>
@@ -346,7 +360,7 @@
           <a:p>
             <a:fld id="{C1FF6DA9-008F-8B48-92A6-B652298478BF}" type="slidenum">
               <a:rPr lang="en-US" smtClean="0"/>
-              <a:t>‹#›</a:t>
+              <a:t>‹Nº›</a:t>
             </a:fld>
             <a:endParaRPr lang="en-US"/>
           </a:p>
@@ -398,10 +412,9 @@
           <a:lstStyle/>
           <a:p>
             <a:r>
-              <a:rPr lang="en-US" smtClean="0"/>
+              <a:rPr lang="en-US"/>
               <a:t>Click to edit Master title style</a:t>
             </a:r>
-            <a:endParaRPr lang="en-US"/>
           </a:p>
         </p:txBody>
       </p:sp>
@@ -422,38 +435,37 @@
           <a:p>
             <a:pPr lvl="0"/>
             <a:r>
-              <a:rPr lang="en-US" smtClean="0"/>
+              <a:rPr lang="en-US"/>
               <a:t>Click to edit Master text styles</a:t>
             </a:r>
           </a:p>
           <a:p>
             <a:pPr lvl="1"/>
             <a:r>
-              <a:rPr lang="en-US" smtClean="0"/>
+              <a:rPr lang="en-US"/>
               <a:t>Second level</a:t>
             </a:r>
           </a:p>
           <a:p>
             <a:pPr lvl="2"/>
             <a:r>
-              <a:rPr lang="en-US" smtClean="0"/>
+              <a:rPr lang="en-US"/>
               <a:t>Third level</a:t>
             </a:r>
           </a:p>
           <a:p>
             <a:pPr lvl="3"/>
             <a:r>
-              <a:rPr lang="en-US" smtClean="0"/>
+              <a:rPr lang="en-US"/>
               <a:t>Fourth level</a:t>
             </a:r>
           </a:p>
           <a:p>
             <a:pPr lvl="4"/>
             <a:r>
-              <a:rPr lang="en-US" smtClean="0"/>
+              <a:rPr lang="en-US"/>
               <a:t>Fifth level</a:t>
             </a:r>
-            <a:endParaRPr lang="en-US"/>
           </a:p>
         </p:txBody>
       </p:sp>
@@ -474,7 +486,7 @@
           <a:p>
             <a:fld id="{5BCAD085-E8A6-8845-BD4E-CB4CCA059FC4}" type="datetimeFigureOut">
               <a:rPr lang="en-US" smtClean="0"/>
-              <a:t>1/27/13</a:t>
+              <a:t>5/18/2026</a:t>
             </a:fld>
             <a:endParaRPr lang="en-US"/>
           </a:p>
@@ -516,7 +528,7 @@
           <a:p>
             <a:fld id="{C1FF6DA9-008F-8B48-92A6-B652298478BF}" type="slidenum">
               <a:rPr lang="en-US" smtClean="0"/>
-              <a:t>‹#›</a:t>
+              <a:t>‹Nº›</a:t>
             </a:fld>
             <a:endParaRPr lang="en-US"/>
           </a:p>
@@ -573,10 +585,9 @@
           <a:lstStyle/>
           <a:p>
             <a:r>
-              <a:rPr lang="en-US" smtClean="0"/>
+              <a:rPr lang="en-US"/>
               <a:t>Click to edit Master title style</a:t>
             </a:r>
-            <a:endParaRPr lang="en-US"/>
           </a:p>
         </p:txBody>
       </p:sp>
@@ -602,38 +613,37 @@
           <a:p>
             <a:pPr lvl="0"/>
             <a:r>
-              <a:rPr lang="en-US" smtClean="0"/>
+              <a:rPr lang="en-US"/>
               <a:t>Click to edit Master text styles</a:t>
             </a:r>
           </a:p>
           <a:p>
             <a:pPr lvl="1"/>
             <a:r>
-              <a:rPr lang="en-US" smtClean="0"/>
+              <a:rPr lang="en-US"/>
               <a:t>Second level</a:t>
             </a:r>
           </a:p>
           <a:p>
             <a:pPr lvl="2"/>
             <a:r>
-              <a:rPr lang="en-US" smtClean="0"/>
+              <a:rPr lang="en-US"/>
               <a:t>Third level</a:t>
             </a:r>
           </a:p>
           <a:p>
             <a:pPr lvl="3"/>
             <a:r>
-              <a:rPr lang="en-US" smtClean="0"/>
+              <a:rPr lang="en-US"/>
               <a:t>Fourth level</a:t>
             </a:r>
           </a:p>
           <a:p>
             <a:pPr lvl="4"/>
             <a:r>
-              <a:rPr lang="en-US" smtClean="0"/>
+              <a:rPr lang="en-US"/>
               <a:t>Fifth level</a:t>
             </a:r>
-            <a:endParaRPr lang="en-US"/>
           </a:p>
         </p:txBody>
       </p:sp>
@@ -654,7 +664,7 @@
           <a:p>
             <a:fld id="{5BCAD085-E8A6-8845-BD4E-CB4CCA059FC4}" type="datetimeFigureOut">
               <a:rPr lang="en-US" smtClean="0"/>
-              <a:t>1/27/13</a:t>
+              <a:t>5/18/2026</a:t>
             </a:fld>
             <a:endParaRPr lang="en-US"/>
           </a:p>
@@ -696,7 +706,7 @@
           <a:p>
             <a:fld id="{C1FF6DA9-008F-8B48-92A6-B652298478BF}" type="slidenum">
               <a:rPr lang="en-US" smtClean="0"/>
-              <a:t>‹#›</a:t>
+              <a:t>‹Nº›</a:t>
             </a:fld>
             <a:endParaRPr lang="en-US"/>
           </a:p>
@@ -748,10 +758,9 @@
           <a:lstStyle/>
           <a:p>
             <a:r>
-              <a:rPr lang="en-US" smtClean="0"/>
+              <a:rPr lang="en-US"/>
               <a:t>Click to edit Master title style</a:t>
             </a:r>
-            <a:endParaRPr lang="en-US"/>
           </a:p>
         </p:txBody>
       </p:sp>
@@ -772,38 +781,37 @@
           <a:p>
             <a:pPr lvl="0"/>
             <a:r>
-              <a:rPr lang="en-US" smtClean="0"/>
+              <a:rPr lang="en-US"/>
               <a:t>Click to edit Master text styles</a:t>
             </a:r>
           </a:p>
           <a:p>
             <a:pPr lvl="1"/>
             <a:r>
-              <a:rPr lang="en-US" smtClean="0"/>
+              <a:rPr lang="en-US"/>
               <a:t>Second level</a:t>
             </a:r>
           </a:p>
           <a:p>
             <a:pPr lvl="2"/>
             <a:r>
-              <a:rPr lang="en-US" smtClean="0"/>
+              <a:rPr lang="en-US"/>
               <a:t>Third level</a:t>
             </a:r>
           </a:p>
           <a:p>
             <a:pPr lvl="3"/>
             <a:r>
-              <a:rPr lang="en-US" smtClean="0"/>
+              <a:rPr lang="en-US"/>
               <a:t>Fourth level</a:t>
             </a:r>
           </a:p>
           <a:p>
             <a:pPr lvl="4"/>
             <a:r>
-              <a:rPr lang="en-US" smtClean="0"/>
+              <a:rPr lang="en-US"/>
               <a:t>Fifth level</a:t>
             </a:r>
-            <a:endParaRPr lang="en-US"/>
           </a:p>
         </p:txBody>
       </p:sp>
@@ -824,7 +832,7 @@
           <a:p>
             <a:fld id="{5BCAD085-E8A6-8845-BD4E-CB4CCA059FC4}" type="datetimeFigureOut">
               <a:rPr lang="en-US" smtClean="0"/>
-              <a:t>1/27/13</a:t>
+              <a:t>5/18/2026</a:t>
             </a:fld>
             <a:endParaRPr lang="en-US"/>
           </a:p>
@@ -866,7 +874,7 @@
           <a:p>
             <a:fld id="{C1FF6DA9-008F-8B48-92A6-B652298478BF}" type="slidenum">
               <a:rPr lang="en-US" smtClean="0"/>
-              <a:t>‹#›</a:t>
+              <a:t>‹Nº›</a:t>
             </a:fld>
             <a:endParaRPr lang="en-US"/>
           </a:p>
@@ -927,10 +935,9 @@
           </a:lstStyle>
           <a:p>
             <a:r>
-              <a:rPr lang="en-US" smtClean="0"/>
+              <a:rPr lang="en-US"/>
               <a:t>Click to edit Master title style</a:t>
             </a:r>
-            <a:endParaRPr lang="en-US"/>
           </a:p>
         </p:txBody>
       </p:sp>
@@ -1047,7 +1054,7 @@
           <a:p>
             <a:pPr lvl="0"/>
             <a:r>
-              <a:rPr lang="en-US" smtClean="0"/>
+              <a:rPr lang="en-US"/>
               <a:t>Click to edit Master text styles</a:t>
             </a:r>
           </a:p>
@@ -1070,7 +1077,7 @@
           <a:p>
             <a:fld id="{5BCAD085-E8A6-8845-BD4E-CB4CCA059FC4}" type="datetimeFigureOut">
               <a:rPr lang="en-US" smtClean="0"/>
-              <a:t>1/27/13</a:t>
+              <a:t>5/18/2026</a:t>
             </a:fld>
             <a:endParaRPr lang="en-US"/>
           </a:p>
@@ -1112,7 +1119,7 @@
           <a:p>
             <a:fld id="{C1FF6DA9-008F-8B48-92A6-B652298478BF}" type="slidenum">
               <a:rPr lang="en-US" smtClean="0"/>
-              <a:t>‹#›</a:t>
+              <a:t>‹Nº›</a:t>
             </a:fld>
             <a:endParaRPr lang="en-US"/>
           </a:p>
@@ -1164,10 +1171,9 @@
           <a:lstStyle/>
           <a:p>
             <a:r>
-              <a:rPr lang="en-US" smtClean="0"/>
+              <a:rPr lang="en-US"/>
               <a:t>Click to edit Master title style</a:t>
             </a:r>
-            <a:endParaRPr lang="en-US"/>
           </a:p>
         </p:txBody>
       </p:sp>
@@ -1221,38 +1227,37 @@
           <a:p>
             <a:pPr lvl="0"/>
             <a:r>
-              <a:rPr lang="en-US" smtClean="0"/>
+              <a:rPr lang="en-US"/>
               <a:t>Click to edit Master text styles</a:t>
             </a:r>
           </a:p>
           <a:p>
             <a:pPr lvl="1"/>
             <a:r>
-              <a:rPr lang="en-US" smtClean="0"/>
+              <a:rPr lang="en-US"/>
               <a:t>Second level</a:t>
             </a:r>
           </a:p>
           <a:p>
             <a:pPr lvl="2"/>
             <a:r>
-              <a:rPr lang="en-US" smtClean="0"/>
+              <a:rPr lang="en-US"/>
               <a:t>Third level</a:t>
             </a:r>
           </a:p>
           <a:p>
             <a:pPr lvl="3"/>
             <a:r>
-              <a:rPr lang="en-US" smtClean="0"/>
+              <a:rPr lang="en-US"/>
               <a:t>Fourth level</a:t>
             </a:r>
           </a:p>
           <a:p>
             <a:pPr lvl="4"/>
             <a:r>
-              <a:rPr lang="en-US" smtClean="0"/>
+              <a:rPr lang="en-US"/>
               <a:t>Fifth level</a:t>
             </a:r>
-            <a:endParaRPr lang="en-US"/>
           </a:p>
         </p:txBody>
       </p:sp>
@@ -1306,38 +1311,37 @@
           <a:p>
             <a:pPr lvl="0"/>
             <a:r>
-              <a:rPr lang="en-US" smtClean="0"/>
+              <a:rPr lang="en-US"/>
               <a:t>Click to edit Master text styles</a:t>
             </a:r>
           </a:p>
           <a:p>
             <a:pPr lvl="1"/>
             <a:r>
-              <a:rPr lang="en-US" smtClean="0"/>
+              <a:rPr lang="en-US"/>
               <a:t>Second level</a:t>
             </a:r>
           </a:p>
           <a:p>
             <a:pPr lvl="2"/>
             <a:r>
-              <a:rPr lang="en-US" smtClean="0"/>
+              <a:rPr lang="en-US"/>
               <a:t>Third level</a:t>
             </a:r>
           </a:p>
           <a:p>
             <a:pPr lvl="3"/>
             <a:r>
-              <a:rPr lang="en-US" smtClean="0"/>
+              <a:rPr lang="en-US"/>
               <a:t>Fourth level</a:t>
             </a:r>
           </a:p>
           <a:p>
             <a:pPr lvl="4"/>
             <a:r>
-              <a:rPr lang="en-US" smtClean="0"/>
+              <a:rPr lang="en-US"/>
               <a:t>Fifth level</a:t>
             </a:r>
-            <a:endParaRPr lang="en-US"/>
           </a:p>
         </p:txBody>
       </p:sp>
@@ -1358,7 +1362,7 @@
           <a:p>
             <a:fld id="{5BCAD085-E8A6-8845-BD4E-CB4CCA059FC4}" type="datetimeFigureOut">
               <a:rPr lang="en-US" smtClean="0"/>
-              <a:t>1/27/13</a:t>
+              <a:t>5/18/2026</a:t>
             </a:fld>
             <a:endParaRPr lang="en-US"/>
           </a:p>
@@ -1400,7 +1404,7 @@
           <a:p>
             <a:fld id="{C1FF6DA9-008F-8B48-92A6-B652298478BF}" type="slidenum">
               <a:rPr lang="en-US" smtClean="0"/>
-              <a:t>‹#›</a:t>
+              <a:t>‹Nº›</a:t>
             </a:fld>
             <a:endParaRPr lang="en-US"/>
           </a:p>
@@ -1456,10 +1460,9 @@
           </a:lstStyle>
           <a:p>
             <a:r>
-              <a:rPr lang="en-US" smtClean="0"/>
+              <a:rPr lang="en-US"/>
               <a:t>Click to edit Master title style</a:t>
             </a:r>
-            <a:endParaRPr lang="en-US"/>
           </a:p>
         </p:txBody>
       </p:sp>
@@ -1522,7 +1525,7 @@
           <a:p>
             <a:pPr lvl="0"/>
             <a:r>
-              <a:rPr lang="en-US" smtClean="0"/>
+              <a:rPr lang="en-US"/>
               <a:t>Click to edit Master text styles</a:t>
             </a:r>
           </a:p>
@@ -1578,38 +1581,37 @@
           <a:p>
             <a:pPr lvl="0"/>
             <a:r>
-              <a:rPr lang="en-US" smtClean="0"/>
+              <a:rPr lang="en-US"/>
               <a:t>Click to edit Master text styles</a:t>
             </a:r>
           </a:p>
           <a:p>
             <a:pPr lvl="1"/>
             <a:r>
-              <a:rPr lang="en-US" smtClean="0"/>
+              <a:rPr lang="en-US"/>
               <a:t>Second level</a:t>
             </a:r>
           </a:p>
           <a:p>
             <a:pPr lvl="2"/>
             <a:r>
-              <a:rPr lang="en-US" smtClean="0"/>
+              <a:rPr lang="en-US"/>
               <a:t>Third level</a:t>
             </a:r>
           </a:p>
           <a:p>
             <a:pPr lvl="3"/>
             <a:r>
-              <a:rPr lang="en-US" smtClean="0"/>
+              <a:rPr lang="en-US"/>
               <a:t>Fourth level</a:t>
             </a:r>
           </a:p>
           <a:p>
             <a:pPr lvl="4"/>
             <a:r>
-              <a:rPr lang="en-US" smtClean="0"/>
+              <a:rPr lang="en-US"/>
               <a:t>Fifth level</a:t>
             </a:r>
-            <a:endParaRPr lang="en-US"/>
           </a:p>
         </p:txBody>
       </p:sp>
@@ -1672,7 +1674,7 @@
           <a:p>
             <a:pPr lvl="0"/>
             <a:r>
-              <a:rPr lang="en-US" smtClean="0"/>
+              <a:rPr lang="en-US"/>
               <a:t>Click to edit Master text styles</a:t>
             </a:r>
           </a:p>
@@ -1728,38 +1730,37 @@
           <a:p>
             <a:pPr lvl="0"/>
             <a:r>
-              <a:rPr lang="en-US" smtClean="0"/>
+              <a:rPr lang="en-US"/>
               <a:t>Click to edit Master text styles</a:t>
             </a:r>
           </a:p>
           <a:p>
             <a:pPr lvl="1"/>
             <a:r>
-              <a:rPr lang="en-US" smtClean="0"/>
+              <a:rPr lang="en-US"/>
               <a:t>Second level</a:t>
             </a:r>
           </a:p>
           <a:p>
             <a:pPr lvl="2"/>
             <a:r>
-              <a:rPr lang="en-US" smtClean="0"/>
+              <a:rPr lang="en-US"/>
               <a:t>Third level</a:t>
             </a:r>
           </a:p>
           <a:p>
             <a:pPr lvl="3"/>
             <a:r>
-              <a:rPr lang="en-US" smtClean="0"/>
+              <a:rPr lang="en-US"/>
               <a:t>Fourth level</a:t>
             </a:r>
           </a:p>
           <a:p>
             <a:pPr lvl="4"/>
             <a:r>
-              <a:rPr lang="en-US" smtClean="0"/>
+              <a:rPr lang="en-US"/>
               <a:t>Fifth level</a:t>
             </a:r>
-            <a:endParaRPr lang="en-US"/>
           </a:p>
         </p:txBody>
       </p:sp>
@@ -1780,7 +1781,7 @@
           <a:p>
             <a:fld id="{5BCAD085-E8A6-8845-BD4E-CB4CCA059FC4}" type="datetimeFigureOut">
               <a:rPr lang="en-US" smtClean="0"/>
-              <a:t>1/27/13</a:t>
+              <a:t>5/18/2026</a:t>
             </a:fld>
             <a:endParaRPr lang="en-US"/>
           </a:p>
@@ -1822,7 +1823,7 @@
           <a:p>
             <a:fld id="{C1FF6DA9-008F-8B48-92A6-B652298478BF}" type="slidenum">
               <a:rPr lang="en-US" smtClean="0"/>
-              <a:t>‹#›</a:t>
+              <a:t>‹Nº›</a:t>
             </a:fld>
             <a:endParaRPr lang="en-US"/>
           </a:p>
@@ -1874,10 +1875,9 @@
           <a:lstStyle/>
           <a:p>
             <a:r>
-              <a:rPr lang="en-US" smtClean="0"/>
+              <a:rPr lang="en-US"/>
               <a:t>Click to edit Master title style</a:t>
             </a:r>
-            <a:endParaRPr lang="en-US"/>
           </a:p>
         </p:txBody>
       </p:sp>
@@ -1898,7 +1898,7 @@
           <a:p>
             <a:fld id="{5BCAD085-E8A6-8845-BD4E-CB4CCA059FC4}" type="datetimeFigureOut">
               <a:rPr lang="en-US" smtClean="0"/>
-              <a:t>1/27/13</a:t>
+              <a:t>5/18/2026</a:t>
             </a:fld>
             <a:endParaRPr lang="en-US"/>
           </a:p>
@@ -1940,7 +1940,7 @@
           <a:p>
             <a:fld id="{C1FF6DA9-008F-8B48-92A6-B652298478BF}" type="slidenum">
               <a:rPr lang="en-US" smtClean="0"/>
-              <a:t>‹#›</a:t>
+              <a:t>‹Nº›</a:t>
             </a:fld>
             <a:endParaRPr lang="en-US"/>
           </a:p>
@@ -1993,7 +1993,7 @@
           <a:p>
             <a:fld id="{5BCAD085-E8A6-8845-BD4E-CB4CCA059FC4}" type="datetimeFigureOut">
               <a:rPr lang="en-US" smtClean="0"/>
-              <a:t>1/27/13</a:t>
+              <a:t>5/18/2026</a:t>
             </a:fld>
             <a:endParaRPr lang="en-US"/>
           </a:p>
@@ -2035,7 +2035,7 @@
           <a:p>
             <a:fld id="{C1FF6DA9-008F-8B48-92A6-B652298478BF}" type="slidenum">
               <a:rPr lang="en-US" smtClean="0"/>
-              <a:t>‹#›</a:t>
+              <a:t>‹Nº›</a:t>
             </a:fld>
             <a:endParaRPr lang="en-US"/>
           </a:p>
@@ -2096,10 +2096,9 @@
           </a:lstStyle>
           <a:p>
             <a:r>
-              <a:rPr lang="en-US" smtClean="0"/>
+              <a:rPr lang="en-US"/>
               <a:t>Click to edit Master title style</a:t>
             </a:r>
-            <a:endParaRPr lang="en-US"/>
           </a:p>
         </p:txBody>
       </p:sp>
@@ -2153,38 +2152,37 @@
           <a:p>
             <a:pPr lvl="0"/>
             <a:r>
-              <a:rPr lang="en-US" smtClean="0"/>
+              <a:rPr lang="en-US"/>
               <a:t>Click to edit Master text styles</a:t>
             </a:r>
           </a:p>
           <a:p>
             <a:pPr lvl="1"/>
             <a:r>
-              <a:rPr lang="en-US" smtClean="0"/>
+              <a:rPr lang="en-US"/>
               <a:t>Second level</a:t>
             </a:r>
           </a:p>
           <a:p>
             <a:pPr lvl="2"/>
             <a:r>
-              <a:rPr lang="en-US" smtClean="0"/>
+              <a:rPr lang="en-US"/>
               <a:t>Third level</a:t>
             </a:r>
           </a:p>
           <a:p>
             <a:pPr lvl="3"/>
             <a:r>
-              <a:rPr lang="en-US" smtClean="0"/>
+              <a:rPr lang="en-US"/>
               <a:t>Fourth level</a:t>
             </a:r>
           </a:p>
           <a:p>
             <a:pPr lvl="4"/>
             <a:r>
-              <a:rPr lang="en-US" smtClean="0"/>
+              <a:rPr lang="en-US"/>
               <a:t>Fifth level</a:t>
             </a:r>
-            <a:endParaRPr lang="en-US"/>
           </a:p>
         </p:txBody>
       </p:sp>
@@ -2247,7 +2245,7 @@
           <a:p>
             <a:pPr lvl="0"/>
             <a:r>
-              <a:rPr lang="en-US" smtClean="0"/>
+              <a:rPr lang="en-US"/>
               <a:t>Click to edit Master text styles</a:t>
             </a:r>
           </a:p>
@@ -2270,7 +2268,7 @@
           <a:p>
             <a:fld id="{5BCAD085-E8A6-8845-BD4E-CB4CCA059FC4}" type="datetimeFigureOut">
               <a:rPr lang="en-US" smtClean="0"/>
-              <a:t>1/27/13</a:t>
+              <a:t>5/18/2026</a:t>
             </a:fld>
             <a:endParaRPr lang="en-US"/>
           </a:p>
@@ -2312,7 +2310,7 @@
           <a:p>
             <a:fld id="{C1FF6DA9-008F-8B48-92A6-B652298478BF}" type="slidenum">
               <a:rPr lang="en-US" smtClean="0"/>
-              <a:t>‹#›</a:t>
+              <a:t>‹Nº›</a:t>
             </a:fld>
             <a:endParaRPr lang="en-US"/>
           </a:p>
@@ -2373,10 +2371,9 @@
           </a:lstStyle>
           <a:p>
             <a:r>
-              <a:rPr lang="en-US" smtClean="0"/>
+              <a:rPr lang="en-US"/>
               <a:t>Click to edit Master title style</a:t>
             </a:r>
-            <a:endParaRPr lang="en-US"/>
           </a:p>
         </p:txBody>
       </p:sp>
@@ -2500,7 +2497,7 @@
           <a:p>
             <a:pPr lvl="0"/>
             <a:r>
-              <a:rPr lang="en-US" smtClean="0"/>
+              <a:rPr lang="en-US"/>
               <a:t>Click to edit Master text styles</a:t>
             </a:r>
           </a:p>
@@ -2523,7 +2520,7 @@
           <a:p>
             <a:fld id="{5BCAD085-E8A6-8845-BD4E-CB4CCA059FC4}" type="datetimeFigureOut">
               <a:rPr lang="en-US" smtClean="0"/>
-              <a:t>1/27/13</a:t>
+              <a:t>5/18/2026</a:t>
             </a:fld>
             <a:endParaRPr lang="en-US"/>
           </a:p>
@@ -2565,7 +2562,7 @@
           <a:p>
             <a:fld id="{C1FF6DA9-008F-8B48-92A6-B652298478BF}" type="slidenum">
               <a:rPr lang="en-US" smtClean="0"/>
-              <a:t>‹#›</a:t>
+              <a:t>‹Nº›</a:t>
             </a:fld>
             <a:endParaRPr lang="en-US"/>
           </a:p>
@@ -2632,10 +2629,9 @@
           <a:lstStyle/>
           <a:p>
             <a:r>
-              <a:rPr lang="en-US" smtClean="0"/>
+              <a:rPr lang="en-US"/>
               <a:t>Click to edit Master title style</a:t>
             </a:r>
-            <a:endParaRPr lang="en-US"/>
           </a:p>
         </p:txBody>
       </p:sp>
@@ -2666,38 +2662,37 @@
           <a:p>
             <a:pPr lvl="0"/>
             <a:r>
-              <a:rPr lang="en-US" smtClean="0"/>
+              <a:rPr lang="en-US"/>
               <a:t>Click to edit Master text styles</a:t>
             </a:r>
           </a:p>
           <a:p>
             <a:pPr lvl="1"/>
             <a:r>
-              <a:rPr lang="en-US" smtClean="0"/>
+              <a:rPr lang="en-US"/>
               <a:t>Second level</a:t>
             </a:r>
           </a:p>
           <a:p>
             <a:pPr lvl="2"/>
             <a:r>
-              <a:rPr lang="en-US" smtClean="0"/>
+              <a:rPr lang="en-US"/>
               <a:t>Third level</a:t>
             </a:r>
           </a:p>
           <a:p>
             <a:pPr lvl="3"/>
             <a:r>
-              <a:rPr lang="en-US" smtClean="0"/>
+              <a:rPr lang="en-US"/>
               <a:t>Fourth level</a:t>
             </a:r>
           </a:p>
           <a:p>
             <a:pPr lvl="4"/>
             <a:r>
-              <a:rPr lang="en-US" smtClean="0"/>
+              <a:rPr lang="en-US"/>
               <a:t>Fifth level</a:t>
             </a:r>
-            <a:endParaRPr lang="en-US"/>
           </a:p>
         </p:txBody>
       </p:sp>
@@ -2736,7 +2731,7 @@
           <a:p>
             <a:fld id="{5BCAD085-E8A6-8845-BD4E-CB4CCA059FC4}" type="datetimeFigureOut">
               <a:rPr lang="en-US" smtClean="0"/>
-              <a:t>1/27/13</a:t>
+              <a:t>5/18/2026</a:t>
             </a:fld>
             <a:endParaRPr lang="en-US"/>
           </a:p>
@@ -2814,7 +2809,7 @@
           <a:p>
             <a:fld id="{C1FF6DA9-008F-8B48-92A6-B652298478BF}" type="slidenum">
               <a:rPr lang="en-US" smtClean="0"/>
-              <a:t>‹#›</a:t>
+              <a:t>‹Nº›</a:t>
             </a:fld>
             <a:endParaRPr lang="en-US"/>
           </a:p>
@@ -3095,7 +3090,7 @@
 </file>
 
 <file path=ppt/slides/slide1.xml><?xml version="1.0" encoding="utf-8"?>
-<p:sld xmlns:a="http://schemas.openxmlformats.org/drawingml/2006/main" xmlns:p="http://schemas.openxmlformats.org/presentationml/2006/main" xmlns:r="http://schemas.openxmlformats.org/officeDocument/2006/relationships">
+<p:sld xmlns:a="http://schemas.openxmlformats.org/drawingml/2006/main" xmlns:r="http://schemas.openxmlformats.org/officeDocument/2006/relationships" xmlns:p="http://schemas.openxmlformats.org/presentationml/2006/main">
   <p:cSld>
     <p:spTree>
       <p:nvGrpSpPr>
@@ -3103,7 +3098,14 @@
         <p:cNvGrpSpPr/>
         <p:nvPr/>
       </p:nvGrpSpPr>
-      <p:grpSpPr/>
+      <p:grpSpPr>
+        <a:xfrm>
+          <a:off x="0" y="0"/>
+          <a:ext cx="0" cy="0"/>
+          <a:chOff x="0" y="0"/>
+          <a:chExt cx="0" cy="0"/>
+        </a:xfrm>
+      </p:grpSpPr>
       <p:sp>
         <p:nvSpPr>
           <p:cNvPr id="2" name="Rectangle 1"/>
@@ -3145,6 +3147,7 @@
           <a:lstStyle/>
           <a:p>
             <a:pPr algn="ctr"/>
+            <a:endParaRPr/>
           </a:p>
         </p:txBody>
       </p:sp>
@@ -3189,6 +3192,7 @@
           <a:lstStyle/>
           <a:p>
             <a:pPr algn="ctr"/>
+            <a:endParaRPr/>
           </a:p>
         </p:txBody>
       </p:sp>
@@ -3209,7 +3213,7 @@
           <a:noFill/>
         </p:spPr>
         <p:txBody>
-          <a:bodyPr wrap="square" anchor="t" lIns="45720" rIns="45720">
+          <a:bodyPr wrap="square" lIns="45720" rIns="45720" anchor="t">
             <a:spAutoFit/>
           </a:bodyPr>
           <a:lstStyle/>
@@ -3244,7 +3248,7 @@
           <a:noFill/>
         </p:spPr>
         <p:txBody>
-          <a:bodyPr wrap="square" anchor="t" lIns="45720" rIns="45720">
+          <a:bodyPr wrap="square" lIns="45720" rIns="45720" anchor="t">
             <a:spAutoFit/>
           </a:bodyPr>
           <a:lstStyle/>
@@ -3291,7 +3295,7 @@
           <a:noFill/>
         </p:spPr>
         <p:txBody>
-          <a:bodyPr wrap="square" anchor="t" lIns="45720" rIns="45720">
+          <a:bodyPr wrap="square" lIns="45720" rIns="45720" anchor="t">
             <a:spAutoFit/>
           </a:bodyPr>
           <a:lstStyle/>
@@ -3326,7 +3330,7 @@
           <a:noFill/>
         </p:spPr>
         <p:txBody>
-          <a:bodyPr wrap="square" anchor="t" lIns="45720" rIns="45720">
+          <a:bodyPr wrap="square" lIns="45720" rIns="45720" anchor="t">
             <a:spAutoFit/>
           </a:bodyPr>
           <a:lstStyle/>
@@ -3361,7 +3365,7 @@
           <a:noFill/>
         </p:spPr>
         <p:txBody>
-          <a:bodyPr wrap="square" anchor="t" lIns="45720" rIns="45720">
+          <a:bodyPr wrap="square" lIns="45720" rIns="45720" anchor="t">
             <a:spAutoFit/>
           </a:bodyPr>
           <a:lstStyle/>
@@ -3388,7 +3392,7 @@
 </file>
 
 <file path=ppt/slides/slide10.xml><?xml version="1.0" encoding="utf-8"?>
-<p:sld xmlns:a="http://schemas.openxmlformats.org/drawingml/2006/main" xmlns:p="http://schemas.openxmlformats.org/presentationml/2006/main" xmlns:r="http://schemas.openxmlformats.org/officeDocument/2006/relationships">
+<p:sld xmlns:a="http://schemas.openxmlformats.org/drawingml/2006/main" xmlns:r="http://schemas.openxmlformats.org/officeDocument/2006/relationships" xmlns:p="http://schemas.openxmlformats.org/presentationml/2006/main">
   <p:cSld>
     <p:spTree>
       <p:nvGrpSpPr>
@@ -3396,7 +3400,14 @@
         <p:cNvGrpSpPr/>
         <p:nvPr/>
       </p:nvGrpSpPr>
-      <p:grpSpPr/>
+      <p:grpSpPr>
+        <a:xfrm>
+          <a:off x="0" y="0"/>
+          <a:ext cx="0" cy="0"/>
+          <a:chOff x="0" y="0"/>
+          <a:chExt cx="0" cy="0"/>
+        </a:xfrm>
+      </p:grpSpPr>
       <p:sp>
         <p:nvSpPr>
           <p:cNvPr id="2" name="Rectangle 1"/>
@@ -3438,6 +3449,7 @@
           <a:lstStyle/>
           <a:p>
             <a:pPr algn="ctr"/>
+            <a:endParaRPr/>
           </a:p>
         </p:txBody>
       </p:sp>
@@ -3458,7 +3470,7 @@
           <a:noFill/>
         </p:spPr>
         <p:txBody>
-          <a:bodyPr wrap="square" anchor="ctr" lIns="45720" rIns="45720">
+          <a:bodyPr wrap="square" lIns="45720" rIns="45720" anchor="ctr">
             <a:spAutoFit/>
           </a:bodyPr>
           <a:lstStyle/>
@@ -3517,6 +3529,7 @@
           <a:lstStyle/>
           <a:p>
             <a:pPr algn="ctr"/>
+            <a:endParaRPr/>
           </a:p>
         </p:txBody>
       </p:sp>
@@ -3561,7 +3574,7 @@
           <a:noFill/>
         </p:spPr>
         <p:txBody>
-          <a:bodyPr wrap="square" anchor="t" lIns="45720" rIns="45720">
+          <a:bodyPr wrap="square" lIns="45720" rIns="45720" anchor="t">
             <a:spAutoFit/>
           </a:bodyPr>
           <a:lstStyle/>
@@ -3596,7 +3609,7 @@
           <a:noFill/>
         </p:spPr>
         <p:txBody>
-          <a:bodyPr wrap="square" anchor="t" lIns="45720" rIns="45720">
+          <a:bodyPr wrap="square" lIns="45720" rIns="45720" anchor="t">
             <a:spAutoFit/>
           </a:bodyPr>
           <a:lstStyle/>
@@ -3631,7 +3644,7 @@
           <a:noFill/>
         </p:spPr>
         <p:txBody>
-          <a:bodyPr wrap="square" anchor="t" lIns="45720" rIns="45720">
+          <a:bodyPr wrap="square" lIns="45720" rIns="45720" anchor="t">
             <a:spAutoFit/>
           </a:bodyPr>
           <a:lstStyle/>
@@ -3666,7 +3679,7 @@
           <a:noFill/>
         </p:spPr>
         <p:txBody>
-          <a:bodyPr wrap="square" anchor="t" lIns="45720" rIns="45720">
+          <a:bodyPr wrap="square" lIns="45720" rIns="45720" anchor="t">
             <a:spAutoFit/>
           </a:bodyPr>
           <a:lstStyle/>
@@ -3701,7 +3714,7 @@
           <a:noFill/>
         </p:spPr>
         <p:txBody>
-          <a:bodyPr wrap="square" anchor="t" lIns="45720" rIns="45720">
+          <a:bodyPr wrap="square" lIns="45720" rIns="45720" anchor="t">
             <a:spAutoFit/>
           </a:bodyPr>
           <a:lstStyle/>
@@ -3736,7 +3749,7 @@
           <a:noFill/>
         </p:spPr>
         <p:txBody>
-          <a:bodyPr wrap="square" anchor="t" lIns="45720" rIns="45720">
+          <a:bodyPr wrap="square" lIns="45720" rIns="45720" anchor="t">
             <a:spAutoFit/>
           </a:bodyPr>
           <a:lstStyle/>
@@ -3771,7 +3784,7 @@
           <a:noFill/>
         </p:spPr>
         <p:txBody>
-          <a:bodyPr wrap="square" anchor="t" lIns="45720" rIns="45720">
+          <a:bodyPr wrap="square" lIns="45720" rIns="45720" anchor="t">
             <a:spAutoFit/>
           </a:bodyPr>
           <a:lstStyle/>
@@ -3806,7 +3819,7 @@
           <a:noFill/>
         </p:spPr>
         <p:txBody>
-          <a:bodyPr wrap="square" anchor="t" lIns="45720" rIns="45720">
+          <a:bodyPr wrap="square" lIns="45720" rIns="45720" anchor="t">
             <a:spAutoFit/>
           </a:bodyPr>
           <a:lstStyle/>
@@ -3841,7 +3854,7 @@
           <a:noFill/>
         </p:spPr>
         <p:txBody>
-          <a:bodyPr wrap="square" anchor="t" lIns="45720" rIns="45720">
+          <a:bodyPr wrap="square" lIns="45720" rIns="45720" anchor="t">
             <a:spAutoFit/>
           </a:bodyPr>
           <a:lstStyle/>
@@ -3876,21 +3889,13 @@
           <a:noFill/>
         </p:spPr>
         <p:txBody>
-          <a:bodyPr wrap="square" anchor="t" lIns="45720" rIns="45720">
+          <a:bodyPr wrap="square" lIns="45720" rIns="45720" anchor="t">
             <a:spAutoFit/>
           </a:bodyPr>
           <a:lstStyle/>
           <a:p>
             <a:pPr algn="l"/>
-            <a:r>
-              <a:rPr sz="1300" b="0" i="0">
-                <a:solidFill>
-                  <a:srgbClr val="1F3A68"/>
-                </a:solidFill>
-                <a:latin typeface="Calibri"/>
-              </a:rPr>
-              <a:t/>
-            </a:r>
+            <a:endParaRPr/>
           </a:p>
         </p:txBody>
       </p:sp>
@@ -3911,7 +3916,7 @@
           <a:noFill/>
         </p:spPr>
         <p:txBody>
-          <a:bodyPr wrap="square" anchor="t" lIns="45720" rIns="45720">
+          <a:bodyPr wrap="square" lIns="45720" rIns="45720" anchor="t">
             <a:spAutoFit/>
           </a:bodyPr>
           <a:lstStyle/>
@@ -3946,7 +3951,7 @@
           <a:noFill/>
         </p:spPr>
         <p:txBody>
-          <a:bodyPr wrap="square" anchor="t" lIns="45720" rIns="45720">
+          <a:bodyPr wrap="square" lIns="45720" rIns="45720" anchor="t">
             <a:spAutoFit/>
           </a:bodyPr>
           <a:lstStyle/>
@@ -3981,7 +3986,7 @@
           <a:noFill/>
         </p:spPr>
         <p:txBody>
-          <a:bodyPr wrap="square" anchor="t" lIns="45720" rIns="45720">
+          <a:bodyPr wrap="square" lIns="45720" rIns="45720" anchor="t">
             <a:spAutoFit/>
           </a:bodyPr>
           <a:lstStyle/>
@@ -4008,7 +4013,7 @@
 </file>
 
 <file path=ppt/slides/slide11.xml><?xml version="1.0" encoding="utf-8"?>
-<p:sld xmlns:a="http://schemas.openxmlformats.org/drawingml/2006/main" xmlns:p="http://schemas.openxmlformats.org/presentationml/2006/main" xmlns:r="http://schemas.openxmlformats.org/officeDocument/2006/relationships">
+<p:sld xmlns:a="http://schemas.openxmlformats.org/drawingml/2006/main" xmlns:r="http://schemas.openxmlformats.org/officeDocument/2006/relationships" xmlns:p="http://schemas.openxmlformats.org/presentationml/2006/main">
   <p:cSld>
     <p:spTree>
       <p:nvGrpSpPr>
@@ -4016,7 +4021,14 @@
         <p:cNvGrpSpPr/>
         <p:nvPr/>
       </p:nvGrpSpPr>
-      <p:grpSpPr/>
+      <p:grpSpPr>
+        <a:xfrm>
+          <a:off x="0" y="0"/>
+          <a:ext cx="0" cy="0"/>
+          <a:chOff x="0" y="0"/>
+          <a:chExt cx="0" cy="0"/>
+        </a:xfrm>
+      </p:grpSpPr>
       <p:sp>
         <p:nvSpPr>
           <p:cNvPr id="2" name="Rectangle 1"/>
@@ -4058,6 +4070,7 @@
           <a:lstStyle/>
           <a:p>
             <a:pPr algn="ctr"/>
+            <a:endParaRPr/>
           </a:p>
         </p:txBody>
       </p:sp>
@@ -4078,7 +4091,7 @@
           <a:noFill/>
         </p:spPr>
         <p:txBody>
-          <a:bodyPr wrap="square" anchor="ctr" lIns="45720" rIns="45720">
+          <a:bodyPr wrap="square" lIns="45720" rIns="45720" anchor="ctr">
             <a:spAutoFit/>
           </a:bodyPr>
           <a:lstStyle/>
@@ -4137,6 +4150,7 @@
           <a:lstStyle/>
           <a:p>
             <a:pPr algn="ctr"/>
+            <a:endParaRPr/>
           </a:p>
         </p:txBody>
       </p:sp>
@@ -4205,6 +4219,7 @@
           <a:lstStyle/>
           <a:p>
             <a:pPr algn="ctr"/>
+            <a:endParaRPr/>
           </a:p>
         </p:txBody>
       </p:sp>
@@ -4225,7 +4240,7 @@
           <a:noFill/>
         </p:spPr>
         <p:txBody>
-          <a:bodyPr wrap="square" anchor="t" lIns="45720" rIns="45720">
+          <a:bodyPr wrap="square" lIns="45720" rIns="45720" anchor="t">
             <a:spAutoFit/>
           </a:bodyPr>
           <a:lstStyle/>
@@ -4260,7 +4275,7 @@
           <a:noFill/>
         </p:spPr>
         <p:txBody>
-          <a:bodyPr wrap="square" anchor="t" lIns="45720" rIns="45720">
+          <a:bodyPr wrap="square" lIns="45720" rIns="45720" anchor="t">
             <a:spAutoFit/>
           </a:bodyPr>
           <a:lstStyle/>
@@ -4295,7 +4310,7 @@
           <a:noFill/>
         </p:spPr>
         <p:txBody>
-          <a:bodyPr wrap="square" anchor="t" lIns="45720" rIns="45720">
+          <a:bodyPr wrap="square" lIns="45720" rIns="45720" anchor="t">
             <a:spAutoFit/>
           </a:bodyPr>
           <a:lstStyle/>
@@ -4330,7 +4345,7 @@
           <a:noFill/>
         </p:spPr>
         <p:txBody>
-          <a:bodyPr wrap="square" anchor="t" lIns="45720" rIns="45720">
+          <a:bodyPr wrap="square" lIns="45720" rIns="45720" anchor="t">
             <a:spAutoFit/>
           </a:bodyPr>
           <a:lstStyle/>
@@ -4365,7 +4380,7 @@
           <a:noFill/>
         </p:spPr>
         <p:txBody>
-          <a:bodyPr wrap="square" anchor="t" lIns="45720" rIns="45720">
+          <a:bodyPr wrap="square" lIns="45720" rIns="45720" anchor="t">
             <a:spAutoFit/>
           </a:bodyPr>
           <a:lstStyle/>
@@ -4400,7 +4415,7 @@
           <a:noFill/>
         </p:spPr>
         <p:txBody>
-          <a:bodyPr wrap="square" anchor="t" lIns="45720" rIns="45720">
+          <a:bodyPr wrap="square" lIns="45720" rIns="45720" anchor="t">
             <a:spAutoFit/>
           </a:bodyPr>
           <a:lstStyle/>
@@ -4435,7 +4450,7 @@
           <a:noFill/>
         </p:spPr>
         <p:txBody>
-          <a:bodyPr wrap="square" anchor="t" lIns="45720" rIns="45720">
+          <a:bodyPr wrap="square" lIns="45720" rIns="45720" anchor="t">
             <a:spAutoFit/>
           </a:bodyPr>
           <a:lstStyle/>
@@ -4470,7 +4485,7 @@
           <a:noFill/>
         </p:spPr>
         <p:txBody>
-          <a:bodyPr wrap="square" anchor="t" lIns="45720" rIns="45720">
+          <a:bodyPr wrap="square" lIns="45720" rIns="45720" anchor="t">
             <a:spAutoFit/>
           </a:bodyPr>
           <a:lstStyle/>
@@ -4505,7 +4520,7 @@
           <a:noFill/>
         </p:spPr>
         <p:txBody>
-          <a:bodyPr wrap="square" anchor="t" lIns="45720" rIns="45720">
+          <a:bodyPr wrap="square" lIns="45720" rIns="45720" anchor="t">
             <a:spAutoFit/>
           </a:bodyPr>
           <a:lstStyle/>
@@ -4540,7 +4555,7 @@
           <a:noFill/>
         </p:spPr>
         <p:txBody>
-          <a:bodyPr wrap="square" anchor="t" lIns="45720" rIns="45720">
+          <a:bodyPr wrap="square" lIns="45720" rIns="45720" anchor="t">
             <a:spAutoFit/>
           </a:bodyPr>
           <a:lstStyle/>
@@ -4575,7 +4590,7 @@
           <a:noFill/>
         </p:spPr>
         <p:txBody>
-          <a:bodyPr wrap="square" anchor="t" lIns="45720" rIns="45720">
+          <a:bodyPr wrap="square" lIns="45720" rIns="45720" anchor="t">
             <a:spAutoFit/>
           </a:bodyPr>
           <a:lstStyle/>
@@ -4610,7 +4625,7 @@
           <a:noFill/>
         </p:spPr>
         <p:txBody>
-          <a:bodyPr wrap="square" anchor="t" lIns="45720" rIns="45720">
+          <a:bodyPr wrap="square" lIns="45720" rIns="45720" anchor="t">
             <a:spAutoFit/>
           </a:bodyPr>
           <a:lstStyle/>
@@ -4645,7 +4660,7 @@
           <a:noFill/>
         </p:spPr>
         <p:txBody>
-          <a:bodyPr wrap="square" anchor="t" lIns="45720" rIns="45720">
+          <a:bodyPr wrap="square" lIns="45720" rIns="45720" anchor="t">
             <a:spAutoFit/>
           </a:bodyPr>
           <a:lstStyle/>
@@ -4704,6 +4719,7 @@
           <a:lstStyle/>
           <a:p>
             <a:pPr algn="ctr"/>
+            <a:endParaRPr/>
           </a:p>
         </p:txBody>
       </p:sp>
@@ -4724,7 +4740,7 @@
           <a:noFill/>
         </p:spPr>
         <p:txBody>
-          <a:bodyPr wrap="square" anchor="t" lIns="45720" rIns="45720">
+          <a:bodyPr wrap="square" lIns="45720" rIns="45720" anchor="t">
             <a:spAutoFit/>
           </a:bodyPr>
           <a:lstStyle/>
@@ -4759,7 +4775,7 @@
           <a:noFill/>
         </p:spPr>
         <p:txBody>
-          <a:bodyPr wrap="square" anchor="t" lIns="45720" rIns="45720">
+          <a:bodyPr wrap="square" lIns="45720" rIns="45720" anchor="t">
             <a:spAutoFit/>
           </a:bodyPr>
           <a:lstStyle/>
@@ -4818,7 +4834,7 @@
           <a:noFill/>
         </p:spPr>
         <p:txBody>
-          <a:bodyPr wrap="square" anchor="t" lIns="45720" rIns="45720">
+          <a:bodyPr wrap="square" lIns="45720" rIns="45720" anchor="t">
             <a:spAutoFit/>
           </a:bodyPr>
           <a:lstStyle/>
@@ -4845,7 +4861,7 @@
 </file>
 
 <file path=ppt/slides/slide12.xml><?xml version="1.0" encoding="utf-8"?>
-<p:sld xmlns:a="http://schemas.openxmlformats.org/drawingml/2006/main" xmlns:p="http://schemas.openxmlformats.org/presentationml/2006/main" xmlns:r="http://schemas.openxmlformats.org/officeDocument/2006/relationships">
+<p:sld xmlns:a="http://schemas.openxmlformats.org/drawingml/2006/main" xmlns:r="http://schemas.openxmlformats.org/officeDocument/2006/relationships" xmlns:p="http://schemas.openxmlformats.org/presentationml/2006/main">
   <p:cSld>
     <p:spTree>
       <p:nvGrpSpPr>
@@ -4853,7 +4869,14 @@
         <p:cNvGrpSpPr/>
         <p:nvPr/>
       </p:nvGrpSpPr>
-      <p:grpSpPr/>
+      <p:grpSpPr>
+        <a:xfrm>
+          <a:off x="0" y="0"/>
+          <a:ext cx="0" cy="0"/>
+          <a:chOff x="0" y="0"/>
+          <a:chExt cx="0" cy="0"/>
+        </a:xfrm>
+      </p:grpSpPr>
       <p:sp>
         <p:nvSpPr>
           <p:cNvPr id="2" name="Rectangle 1"/>
@@ -4895,6 +4918,7 @@
           <a:lstStyle/>
           <a:p>
             <a:pPr algn="ctr"/>
+            <a:endParaRPr/>
           </a:p>
         </p:txBody>
       </p:sp>
@@ -4915,7 +4939,7 @@
           <a:noFill/>
         </p:spPr>
         <p:txBody>
-          <a:bodyPr wrap="square" anchor="ctr" lIns="45720" rIns="45720">
+          <a:bodyPr wrap="square" lIns="45720" rIns="45720" anchor="ctr">
             <a:spAutoFit/>
           </a:bodyPr>
           <a:lstStyle/>
@@ -4974,6 +4998,7 @@
           <a:lstStyle/>
           <a:p>
             <a:pPr algn="ctr"/>
+            <a:endParaRPr/>
           </a:p>
         </p:txBody>
       </p:sp>
@@ -5090,6 +5115,7 @@
           <a:lstStyle/>
           <a:p>
             <a:pPr algn="ctr"/>
+            <a:endParaRPr/>
           </a:p>
         </p:txBody>
       </p:sp>
@@ -5134,6 +5160,7 @@
           <a:lstStyle/>
           <a:p>
             <a:pPr algn="ctr"/>
+            <a:endParaRPr/>
           </a:p>
         </p:txBody>
       </p:sp>
@@ -5154,7 +5181,7 @@
           <a:noFill/>
         </p:spPr>
         <p:txBody>
-          <a:bodyPr wrap="square" anchor="t" lIns="45720" rIns="45720">
+          <a:bodyPr wrap="square" lIns="45720" rIns="45720" anchor="t">
             <a:spAutoFit/>
           </a:bodyPr>
           <a:lstStyle/>
@@ -5189,7 +5216,7 @@
           <a:noFill/>
         </p:spPr>
         <p:txBody>
-          <a:bodyPr wrap="square" anchor="t" lIns="45720" rIns="45720">
+          <a:bodyPr wrap="square" lIns="45720" rIns="45720" anchor="t">
             <a:spAutoFit/>
           </a:bodyPr>
           <a:lstStyle/>
@@ -5248,6 +5275,7 @@
           <a:lstStyle/>
           <a:p>
             <a:pPr algn="ctr"/>
+            <a:endParaRPr/>
           </a:p>
         </p:txBody>
       </p:sp>
@@ -5292,6 +5320,7 @@
           <a:lstStyle/>
           <a:p>
             <a:pPr algn="ctr"/>
+            <a:endParaRPr/>
           </a:p>
         </p:txBody>
       </p:sp>
@@ -5312,7 +5341,7 @@
           <a:noFill/>
         </p:spPr>
         <p:txBody>
-          <a:bodyPr wrap="square" anchor="t" lIns="45720" rIns="45720">
+          <a:bodyPr wrap="square" lIns="45720" rIns="45720" anchor="t">
             <a:spAutoFit/>
           </a:bodyPr>
           <a:lstStyle/>
@@ -5347,7 +5376,7 @@
           <a:noFill/>
         </p:spPr>
         <p:txBody>
-          <a:bodyPr wrap="square" anchor="t" lIns="45720" rIns="45720">
+          <a:bodyPr wrap="square" lIns="45720" rIns="45720" anchor="t">
             <a:spAutoFit/>
           </a:bodyPr>
           <a:lstStyle/>
@@ -5406,6 +5435,7 @@
           <a:lstStyle/>
           <a:p>
             <a:pPr algn="ctr"/>
+            <a:endParaRPr/>
           </a:p>
         </p:txBody>
       </p:sp>
@@ -5450,6 +5480,7 @@
           <a:lstStyle/>
           <a:p>
             <a:pPr algn="ctr"/>
+            <a:endParaRPr/>
           </a:p>
         </p:txBody>
       </p:sp>
@@ -5470,7 +5501,7 @@
           <a:noFill/>
         </p:spPr>
         <p:txBody>
-          <a:bodyPr wrap="square" anchor="t" lIns="45720" rIns="45720">
+          <a:bodyPr wrap="square" lIns="45720" rIns="45720" anchor="t">
             <a:spAutoFit/>
           </a:bodyPr>
           <a:lstStyle/>
@@ -5505,7 +5536,7 @@
           <a:noFill/>
         </p:spPr>
         <p:txBody>
-          <a:bodyPr wrap="square" anchor="t" lIns="45720" rIns="45720">
+          <a:bodyPr wrap="square" lIns="45720" rIns="45720" anchor="t">
             <a:spAutoFit/>
           </a:bodyPr>
           <a:lstStyle/>
@@ -5564,6 +5595,7 @@
           <a:lstStyle/>
           <a:p>
             <a:pPr algn="ctr"/>
+            <a:endParaRPr/>
           </a:p>
         </p:txBody>
       </p:sp>
@@ -5608,6 +5640,7 @@
           <a:lstStyle/>
           <a:p>
             <a:pPr algn="ctr"/>
+            <a:endParaRPr/>
           </a:p>
         </p:txBody>
       </p:sp>
@@ -5628,7 +5661,7 @@
           <a:noFill/>
         </p:spPr>
         <p:txBody>
-          <a:bodyPr wrap="square" anchor="t" lIns="45720" rIns="45720">
+          <a:bodyPr wrap="square" lIns="45720" rIns="45720" anchor="t">
             <a:spAutoFit/>
           </a:bodyPr>
           <a:lstStyle/>
@@ -5663,7 +5696,7 @@
           <a:noFill/>
         </p:spPr>
         <p:txBody>
-          <a:bodyPr wrap="square" anchor="t" lIns="45720" rIns="45720">
+          <a:bodyPr wrap="square" lIns="45720" rIns="45720" anchor="t">
             <a:spAutoFit/>
           </a:bodyPr>
           <a:lstStyle/>
@@ -5698,7 +5731,7 @@
           <a:noFill/>
         </p:spPr>
         <p:txBody>
-          <a:bodyPr wrap="square" anchor="t" lIns="45720" rIns="45720">
+          <a:bodyPr wrap="square" lIns="45720" rIns="45720" anchor="t">
             <a:spAutoFit/>
           </a:bodyPr>
           <a:lstStyle/>
@@ -5725,7 +5758,7 @@
 </file>
 
 <file path=ppt/slides/slide13.xml><?xml version="1.0" encoding="utf-8"?>
-<p:sld xmlns:a="http://schemas.openxmlformats.org/drawingml/2006/main" xmlns:p="http://schemas.openxmlformats.org/presentationml/2006/main" xmlns:r="http://schemas.openxmlformats.org/officeDocument/2006/relationships">
+<p:sld xmlns:a="http://schemas.openxmlformats.org/drawingml/2006/main" xmlns:r="http://schemas.openxmlformats.org/officeDocument/2006/relationships" xmlns:p="http://schemas.openxmlformats.org/presentationml/2006/main">
   <p:cSld>
     <p:spTree>
       <p:nvGrpSpPr>
@@ -5733,7 +5766,14 @@
         <p:cNvGrpSpPr/>
         <p:nvPr/>
       </p:nvGrpSpPr>
-      <p:grpSpPr/>
+      <p:grpSpPr>
+        <a:xfrm>
+          <a:off x="0" y="0"/>
+          <a:ext cx="0" cy="0"/>
+          <a:chOff x="0" y="0"/>
+          <a:chExt cx="0" cy="0"/>
+        </a:xfrm>
+      </p:grpSpPr>
       <p:sp>
         <p:nvSpPr>
           <p:cNvPr id="2" name="Rectangle 1"/>
@@ -5775,6 +5815,7 @@
           <a:lstStyle/>
           <a:p>
             <a:pPr algn="ctr"/>
+            <a:endParaRPr/>
           </a:p>
         </p:txBody>
       </p:sp>
@@ -5795,7 +5836,7 @@
           <a:noFill/>
         </p:spPr>
         <p:txBody>
-          <a:bodyPr wrap="square" anchor="ctr" lIns="45720" rIns="45720">
+          <a:bodyPr wrap="square" lIns="45720" rIns="45720" anchor="ctr">
             <a:spAutoFit/>
           </a:bodyPr>
           <a:lstStyle/>
@@ -5854,6 +5895,7 @@
           <a:lstStyle/>
           <a:p>
             <a:pPr algn="ctr"/>
+            <a:endParaRPr/>
           </a:p>
         </p:txBody>
       </p:sp>
@@ -5898,7 +5940,7 @@
           <a:noFill/>
         </p:spPr>
         <p:txBody>
-          <a:bodyPr wrap="square" anchor="t" lIns="45720" rIns="45720">
+          <a:bodyPr wrap="square" lIns="45720" rIns="45720" anchor="t">
             <a:spAutoFit/>
           </a:bodyPr>
           <a:lstStyle/>
@@ -5933,7 +5975,7 @@
           <a:noFill/>
         </p:spPr>
         <p:txBody>
-          <a:bodyPr wrap="square" anchor="t" lIns="45720" rIns="45720">
+          <a:bodyPr wrap="square" lIns="45720" rIns="45720" anchor="t">
             <a:spAutoFit/>
           </a:bodyPr>
           <a:lstStyle/>
@@ -5968,7 +6010,7 @@
           <a:noFill/>
         </p:spPr>
         <p:txBody>
-          <a:bodyPr wrap="square" anchor="t" lIns="45720" rIns="45720">
+          <a:bodyPr wrap="square" lIns="45720" rIns="45720" anchor="t">
             <a:spAutoFit/>
           </a:bodyPr>
           <a:lstStyle/>
@@ -6003,7 +6045,7 @@
           <a:noFill/>
         </p:spPr>
         <p:txBody>
-          <a:bodyPr wrap="square" anchor="t" lIns="45720" rIns="45720">
+          <a:bodyPr wrap="square" lIns="45720" rIns="45720" anchor="t">
             <a:spAutoFit/>
           </a:bodyPr>
           <a:lstStyle/>
@@ -6038,7 +6080,7 @@
           <a:noFill/>
         </p:spPr>
         <p:txBody>
-          <a:bodyPr wrap="square" anchor="t" lIns="45720" rIns="45720">
+          <a:bodyPr wrap="square" lIns="45720" rIns="45720" anchor="t">
             <a:spAutoFit/>
           </a:bodyPr>
           <a:lstStyle/>
@@ -6073,7 +6115,7 @@
           <a:noFill/>
         </p:spPr>
         <p:txBody>
-          <a:bodyPr wrap="square" anchor="t" lIns="45720" rIns="45720">
+          <a:bodyPr wrap="square" lIns="45720" rIns="45720" anchor="t">
             <a:spAutoFit/>
           </a:bodyPr>
           <a:lstStyle/>
@@ -6108,7 +6150,7 @@
           <a:noFill/>
         </p:spPr>
         <p:txBody>
-          <a:bodyPr wrap="square" anchor="t" lIns="45720" rIns="45720">
+          <a:bodyPr wrap="square" lIns="45720" rIns="45720" anchor="t">
             <a:spAutoFit/>
           </a:bodyPr>
           <a:lstStyle/>
@@ -6143,7 +6185,7 @@
           <a:noFill/>
         </p:spPr>
         <p:txBody>
-          <a:bodyPr wrap="square" anchor="t" lIns="45720" rIns="45720">
+          <a:bodyPr wrap="square" lIns="45720" rIns="45720" anchor="t">
             <a:spAutoFit/>
           </a:bodyPr>
           <a:lstStyle/>
@@ -6178,7 +6220,7 @@
           <a:noFill/>
         </p:spPr>
         <p:txBody>
-          <a:bodyPr wrap="square" anchor="t" lIns="45720" rIns="45720">
+          <a:bodyPr wrap="square" lIns="45720" rIns="45720" anchor="t">
             <a:spAutoFit/>
           </a:bodyPr>
           <a:lstStyle/>
@@ -6213,7 +6255,7 @@
           <a:noFill/>
         </p:spPr>
         <p:txBody>
-          <a:bodyPr wrap="square" anchor="t" lIns="45720" rIns="45720">
+          <a:bodyPr wrap="square" lIns="45720" rIns="45720" anchor="t">
             <a:spAutoFit/>
           </a:bodyPr>
           <a:lstStyle/>
@@ -6248,7 +6290,7 @@
           <a:noFill/>
         </p:spPr>
         <p:txBody>
-          <a:bodyPr wrap="square" anchor="t" lIns="45720" rIns="45720">
+          <a:bodyPr wrap="square" lIns="45720" rIns="45720" anchor="t">
             <a:spAutoFit/>
           </a:bodyPr>
           <a:lstStyle/>
@@ -6283,7 +6325,7 @@
           <a:noFill/>
         </p:spPr>
         <p:txBody>
-          <a:bodyPr wrap="square" anchor="t" lIns="45720" rIns="45720">
+          <a:bodyPr wrap="square" lIns="45720" rIns="45720" anchor="t">
             <a:spAutoFit/>
           </a:bodyPr>
           <a:lstStyle/>
@@ -6318,7 +6360,7 @@
           <a:noFill/>
         </p:spPr>
         <p:txBody>
-          <a:bodyPr wrap="square" anchor="t" lIns="45720" rIns="45720">
+          <a:bodyPr wrap="square" lIns="45720" rIns="45720" anchor="t">
             <a:spAutoFit/>
           </a:bodyPr>
           <a:lstStyle/>
@@ -6353,7 +6395,7 @@
           <a:noFill/>
         </p:spPr>
         <p:txBody>
-          <a:bodyPr wrap="square" anchor="t" lIns="45720" rIns="45720">
+          <a:bodyPr wrap="square" lIns="45720" rIns="45720" anchor="t">
             <a:spAutoFit/>
           </a:bodyPr>
           <a:lstStyle/>
@@ -6388,7 +6430,7 @@
           <a:noFill/>
         </p:spPr>
         <p:txBody>
-          <a:bodyPr wrap="square" anchor="t" lIns="45720" rIns="45720">
+          <a:bodyPr wrap="square" lIns="45720" rIns="45720" anchor="t">
             <a:spAutoFit/>
           </a:bodyPr>
           <a:lstStyle/>
@@ -6423,7 +6465,7 @@
           <a:noFill/>
         </p:spPr>
         <p:txBody>
-          <a:bodyPr wrap="square" anchor="t" lIns="45720" rIns="45720">
+          <a:bodyPr wrap="square" lIns="45720" rIns="45720" anchor="t">
             <a:spAutoFit/>
           </a:bodyPr>
           <a:lstStyle/>
@@ -6458,7 +6500,7 @@
           <a:noFill/>
         </p:spPr>
         <p:txBody>
-          <a:bodyPr wrap="square" anchor="t" lIns="45720" rIns="45720">
+          <a:bodyPr wrap="square" lIns="45720" rIns="45720" anchor="t">
             <a:spAutoFit/>
           </a:bodyPr>
           <a:lstStyle/>
@@ -6493,7 +6535,7 @@
           <a:noFill/>
         </p:spPr>
         <p:txBody>
-          <a:bodyPr wrap="square" anchor="t" lIns="45720" rIns="45720">
+          <a:bodyPr wrap="square" lIns="45720" rIns="45720" anchor="t">
             <a:spAutoFit/>
           </a:bodyPr>
           <a:lstStyle/>
@@ -6528,7 +6570,7 @@
           <a:noFill/>
         </p:spPr>
         <p:txBody>
-          <a:bodyPr wrap="square" anchor="t" lIns="45720" rIns="45720">
+          <a:bodyPr wrap="square" lIns="45720" rIns="45720" anchor="t">
             <a:spAutoFit/>
           </a:bodyPr>
           <a:lstStyle/>
@@ -6563,7 +6605,7 @@
           <a:noFill/>
         </p:spPr>
         <p:txBody>
-          <a:bodyPr wrap="square" anchor="t" lIns="45720" rIns="45720">
+          <a:bodyPr wrap="square" lIns="45720" rIns="45720" anchor="t">
             <a:spAutoFit/>
           </a:bodyPr>
           <a:lstStyle/>
@@ -6598,7 +6640,7 @@
           <a:noFill/>
         </p:spPr>
         <p:txBody>
-          <a:bodyPr wrap="square" anchor="t" lIns="45720" rIns="45720">
+          <a:bodyPr wrap="square" lIns="45720" rIns="45720" anchor="t">
             <a:spAutoFit/>
           </a:bodyPr>
           <a:lstStyle/>
@@ -6633,7 +6675,7 @@
           <a:noFill/>
         </p:spPr>
         <p:txBody>
-          <a:bodyPr wrap="square" anchor="t" lIns="45720" rIns="45720">
+          <a:bodyPr wrap="square" lIns="45720" rIns="45720" anchor="t">
             <a:spAutoFit/>
           </a:bodyPr>
           <a:lstStyle/>
@@ -6668,7 +6710,7 @@
           <a:noFill/>
         </p:spPr>
         <p:txBody>
-          <a:bodyPr wrap="square" anchor="t" lIns="45720" rIns="45720">
+          <a:bodyPr wrap="square" lIns="45720" rIns="45720" anchor="t">
             <a:spAutoFit/>
           </a:bodyPr>
           <a:lstStyle/>
@@ -6703,7 +6745,7 @@
           <a:noFill/>
         </p:spPr>
         <p:txBody>
-          <a:bodyPr wrap="square" anchor="t" lIns="45720" rIns="45720">
+          <a:bodyPr wrap="square" lIns="45720" rIns="45720" anchor="t">
             <a:spAutoFit/>
           </a:bodyPr>
           <a:lstStyle/>
@@ -6738,7 +6780,7 @@
           <a:noFill/>
         </p:spPr>
         <p:txBody>
-          <a:bodyPr wrap="square" anchor="t" lIns="45720" rIns="45720">
+          <a:bodyPr wrap="square" lIns="45720" rIns="45720" anchor="t">
             <a:spAutoFit/>
           </a:bodyPr>
           <a:lstStyle/>
@@ -6797,6 +6839,7 @@
           <a:lstStyle/>
           <a:p>
             <a:pPr algn="ctr"/>
+            <a:endParaRPr/>
           </a:p>
         </p:txBody>
       </p:sp>
@@ -6817,7 +6860,7 @@
           <a:noFill/>
         </p:spPr>
         <p:txBody>
-          <a:bodyPr wrap="square" anchor="t" lIns="45720" rIns="45720">
+          <a:bodyPr wrap="square" lIns="45720" rIns="45720" anchor="t">
             <a:spAutoFit/>
           </a:bodyPr>
           <a:lstStyle/>
@@ -6852,7 +6895,7 @@
           <a:noFill/>
         </p:spPr>
         <p:txBody>
-          <a:bodyPr wrap="square" anchor="t" lIns="45720" rIns="45720">
+          <a:bodyPr wrap="square" lIns="45720" rIns="45720" anchor="t">
             <a:spAutoFit/>
           </a:bodyPr>
           <a:lstStyle/>
@@ -6879,7 +6922,7 @@
 </file>
 
 <file path=ppt/slides/slide14.xml><?xml version="1.0" encoding="utf-8"?>
-<p:sld xmlns:a="http://schemas.openxmlformats.org/drawingml/2006/main" xmlns:p="http://schemas.openxmlformats.org/presentationml/2006/main" xmlns:r="http://schemas.openxmlformats.org/officeDocument/2006/relationships">
+<p:sld xmlns:a="http://schemas.openxmlformats.org/drawingml/2006/main" xmlns:r="http://schemas.openxmlformats.org/officeDocument/2006/relationships" xmlns:p="http://schemas.openxmlformats.org/presentationml/2006/main">
   <p:cSld>
     <p:spTree>
       <p:nvGrpSpPr>
@@ -6887,7 +6930,14 @@
         <p:cNvGrpSpPr/>
         <p:nvPr/>
       </p:nvGrpSpPr>
-      <p:grpSpPr/>
+      <p:grpSpPr>
+        <a:xfrm>
+          <a:off x="0" y="0"/>
+          <a:ext cx="0" cy="0"/>
+          <a:chOff x="0" y="0"/>
+          <a:chExt cx="0" cy="0"/>
+        </a:xfrm>
+      </p:grpSpPr>
       <p:sp>
         <p:nvSpPr>
           <p:cNvPr id="2" name="Rectangle 1"/>
@@ -6929,6 +6979,7 @@
           <a:lstStyle/>
           <a:p>
             <a:pPr algn="ctr"/>
+            <a:endParaRPr/>
           </a:p>
         </p:txBody>
       </p:sp>
@@ -6949,7 +7000,7 @@
           <a:noFill/>
         </p:spPr>
         <p:txBody>
-          <a:bodyPr wrap="square" anchor="ctr" lIns="45720" rIns="45720">
+          <a:bodyPr wrap="square" lIns="45720" rIns="45720" anchor="ctr">
             <a:spAutoFit/>
           </a:bodyPr>
           <a:lstStyle/>
@@ -7008,6 +7059,7 @@
           <a:lstStyle/>
           <a:p>
             <a:pPr algn="ctr"/>
+            <a:endParaRPr/>
           </a:p>
         </p:txBody>
       </p:sp>
@@ -7052,6 +7104,7 @@
           <a:lstStyle/>
           <a:p>
             <a:pPr algn="ctr"/>
+            <a:endParaRPr/>
           </a:p>
         </p:txBody>
       </p:sp>
@@ -7072,7 +7125,7 @@
           <a:noFill/>
         </p:spPr>
         <p:txBody>
-          <a:bodyPr wrap="square" anchor="ctr" lIns="45720" rIns="45720">
+          <a:bodyPr wrap="square" lIns="45720" rIns="45720" anchor="ctr">
             <a:spAutoFit/>
           </a:bodyPr>
           <a:lstStyle/>
@@ -7131,6 +7184,7 @@
           <a:lstStyle/>
           <a:p>
             <a:pPr algn="ctr"/>
+            <a:endParaRPr/>
           </a:p>
         </p:txBody>
       </p:sp>
@@ -7151,7 +7205,7 @@
           <a:noFill/>
         </p:spPr>
         <p:txBody>
-          <a:bodyPr wrap="square" anchor="t" lIns="45720" rIns="45720">
+          <a:bodyPr wrap="square" lIns="45720" rIns="45720" anchor="t">
             <a:spAutoFit/>
           </a:bodyPr>
           <a:lstStyle/>
@@ -7210,6 +7264,7 @@
           <a:lstStyle/>
           <a:p>
             <a:pPr algn="ctr"/>
+            <a:endParaRPr/>
           </a:p>
         </p:txBody>
       </p:sp>
@@ -7230,7 +7285,7 @@
           <a:noFill/>
         </p:spPr>
         <p:txBody>
-          <a:bodyPr wrap="square" anchor="ctr" lIns="45720" rIns="45720">
+          <a:bodyPr wrap="square" lIns="45720" rIns="45720" anchor="ctr">
             <a:spAutoFit/>
           </a:bodyPr>
           <a:lstStyle/>
@@ -7289,6 +7344,7 @@
           <a:lstStyle/>
           <a:p>
             <a:pPr algn="ctr"/>
+            <a:endParaRPr/>
           </a:p>
         </p:txBody>
       </p:sp>
@@ -7309,7 +7365,7 @@
           <a:noFill/>
         </p:spPr>
         <p:txBody>
-          <a:bodyPr wrap="square" anchor="ctr" lIns="45720" rIns="45720">
+          <a:bodyPr wrap="square" lIns="45720" rIns="45720" anchor="ctr">
             <a:spAutoFit/>
           </a:bodyPr>
           <a:lstStyle/>
@@ -7368,6 +7424,7 @@
           <a:lstStyle/>
           <a:p>
             <a:pPr algn="ctr"/>
+            <a:endParaRPr/>
           </a:p>
         </p:txBody>
       </p:sp>
@@ -7388,7 +7445,7 @@
           <a:noFill/>
         </p:spPr>
         <p:txBody>
-          <a:bodyPr wrap="square" anchor="t" lIns="45720" rIns="45720">
+          <a:bodyPr wrap="square" lIns="45720" rIns="45720" anchor="t">
             <a:spAutoFit/>
           </a:bodyPr>
           <a:lstStyle/>
@@ -7447,6 +7504,7 @@
           <a:lstStyle/>
           <a:p>
             <a:pPr algn="ctr"/>
+            <a:endParaRPr/>
           </a:p>
         </p:txBody>
       </p:sp>
@@ -7467,7 +7525,7 @@
           <a:noFill/>
         </p:spPr>
         <p:txBody>
-          <a:bodyPr wrap="square" anchor="ctr" lIns="45720" rIns="45720">
+          <a:bodyPr wrap="square" lIns="45720" rIns="45720" anchor="ctr">
             <a:spAutoFit/>
           </a:bodyPr>
           <a:lstStyle/>
@@ -7526,6 +7584,7 @@
           <a:lstStyle/>
           <a:p>
             <a:pPr algn="ctr"/>
+            <a:endParaRPr/>
           </a:p>
         </p:txBody>
       </p:sp>
@@ -7546,7 +7605,7 @@
           <a:noFill/>
         </p:spPr>
         <p:txBody>
-          <a:bodyPr wrap="square" anchor="ctr" lIns="45720" rIns="45720">
+          <a:bodyPr wrap="square" lIns="45720" rIns="45720" anchor="ctr">
             <a:spAutoFit/>
           </a:bodyPr>
           <a:lstStyle/>
@@ -7605,6 +7664,7 @@
           <a:lstStyle/>
           <a:p>
             <a:pPr algn="ctr"/>
+            <a:endParaRPr/>
           </a:p>
         </p:txBody>
       </p:sp>
@@ -7625,7 +7685,7 @@
           <a:noFill/>
         </p:spPr>
         <p:txBody>
-          <a:bodyPr wrap="square" anchor="t" lIns="45720" rIns="45720">
+          <a:bodyPr wrap="square" lIns="45720" rIns="45720" anchor="t">
             <a:spAutoFit/>
           </a:bodyPr>
           <a:lstStyle/>
@@ -7684,6 +7744,7 @@
           <a:lstStyle/>
           <a:p>
             <a:pPr algn="ctr"/>
+            <a:endParaRPr/>
           </a:p>
         </p:txBody>
       </p:sp>
@@ -7704,7 +7765,7 @@
           <a:noFill/>
         </p:spPr>
         <p:txBody>
-          <a:bodyPr wrap="square" anchor="ctr" lIns="45720" rIns="45720">
+          <a:bodyPr wrap="square" lIns="45720" rIns="45720" anchor="ctr">
             <a:spAutoFit/>
           </a:bodyPr>
           <a:lstStyle/>
@@ -7763,6 +7824,7 @@
           <a:lstStyle/>
           <a:p>
             <a:pPr algn="ctr"/>
+            <a:endParaRPr/>
           </a:p>
         </p:txBody>
       </p:sp>
@@ -7783,7 +7845,7 @@
           <a:noFill/>
         </p:spPr>
         <p:txBody>
-          <a:bodyPr wrap="square" anchor="ctr" lIns="45720" rIns="45720">
+          <a:bodyPr wrap="square" lIns="45720" rIns="45720" anchor="ctr">
             <a:spAutoFit/>
           </a:bodyPr>
           <a:lstStyle/>
@@ -7842,6 +7904,7 @@
           <a:lstStyle/>
           <a:p>
             <a:pPr algn="ctr"/>
+            <a:endParaRPr/>
           </a:p>
         </p:txBody>
       </p:sp>
@@ -7862,7 +7925,7 @@
           <a:noFill/>
         </p:spPr>
         <p:txBody>
-          <a:bodyPr wrap="square" anchor="t" lIns="45720" rIns="45720">
+          <a:bodyPr wrap="square" lIns="45720" rIns="45720" anchor="t">
             <a:spAutoFit/>
           </a:bodyPr>
           <a:lstStyle/>
@@ -7921,6 +7984,7 @@
           <a:lstStyle/>
           <a:p>
             <a:pPr algn="ctr"/>
+            <a:endParaRPr/>
           </a:p>
         </p:txBody>
       </p:sp>
@@ -7941,7 +8005,7 @@
           <a:noFill/>
         </p:spPr>
         <p:txBody>
-          <a:bodyPr wrap="square" anchor="ctr" lIns="45720" rIns="45720">
+          <a:bodyPr wrap="square" lIns="45720" rIns="45720" anchor="ctr">
             <a:spAutoFit/>
           </a:bodyPr>
           <a:lstStyle/>
@@ -8000,6 +8064,7 @@
           <a:lstStyle/>
           <a:p>
             <a:pPr algn="ctr"/>
+            <a:endParaRPr/>
           </a:p>
         </p:txBody>
       </p:sp>
@@ -8020,7 +8085,7 @@
           <a:noFill/>
         </p:spPr>
         <p:txBody>
-          <a:bodyPr wrap="square" anchor="ctr" lIns="45720" rIns="45720">
+          <a:bodyPr wrap="square" lIns="45720" rIns="45720" anchor="ctr">
             <a:spAutoFit/>
           </a:bodyPr>
           <a:lstStyle/>
@@ -8079,6 +8144,7 @@
           <a:lstStyle/>
           <a:p>
             <a:pPr algn="ctr"/>
+            <a:endParaRPr/>
           </a:p>
         </p:txBody>
       </p:sp>
@@ -8099,7 +8165,7 @@
           <a:noFill/>
         </p:spPr>
         <p:txBody>
-          <a:bodyPr wrap="square" anchor="t" lIns="45720" rIns="45720">
+          <a:bodyPr wrap="square" lIns="45720" rIns="45720" anchor="t">
             <a:spAutoFit/>
           </a:bodyPr>
           <a:lstStyle/>
@@ -8158,6 +8224,7 @@
           <a:lstStyle/>
           <a:p>
             <a:pPr algn="ctr"/>
+            <a:endParaRPr/>
           </a:p>
         </p:txBody>
       </p:sp>
@@ -8178,7 +8245,7 @@
           <a:noFill/>
         </p:spPr>
         <p:txBody>
-          <a:bodyPr wrap="square" anchor="ctr" lIns="45720" rIns="45720">
+          <a:bodyPr wrap="square" lIns="45720" rIns="45720" anchor="ctr">
             <a:spAutoFit/>
           </a:bodyPr>
           <a:lstStyle/>
@@ -8237,6 +8304,7 @@
           <a:lstStyle/>
           <a:p>
             <a:pPr algn="ctr"/>
+            <a:endParaRPr/>
           </a:p>
         </p:txBody>
       </p:sp>
@@ -8257,7 +8325,7 @@
           <a:noFill/>
         </p:spPr>
         <p:txBody>
-          <a:bodyPr wrap="square" anchor="ctr" lIns="45720" rIns="45720">
+          <a:bodyPr wrap="square" lIns="45720" rIns="45720" anchor="ctr">
             <a:spAutoFit/>
           </a:bodyPr>
           <a:lstStyle/>
@@ -8316,6 +8384,7 @@
           <a:lstStyle/>
           <a:p>
             <a:pPr algn="ctr"/>
+            <a:endParaRPr/>
           </a:p>
         </p:txBody>
       </p:sp>
@@ -8336,7 +8405,7 @@
           <a:noFill/>
         </p:spPr>
         <p:txBody>
-          <a:bodyPr wrap="square" anchor="t" lIns="45720" rIns="45720">
+          <a:bodyPr wrap="square" lIns="45720" rIns="45720" anchor="t">
             <a:spAutoFit/>
           </a:bodyPr>
           <a:lstStyle/>
@@ -8395,6 +8464,7 @@
           <a:lstStyle/>
           <a:p>
             <a:pPr algn="ctr"/>
+            <a:endParaRPr/>
           </a:p>
         </p:txBody>
       </p:sp>
@@ -8415,7 +8485,7 @@
           <a:noFill/>
         </p:spPr>
         <p:txBody>
-          <a:bodyPr wrap="square" anchor="ctr" lIns="45720" rIns="45720">
+          <a:bodyPr wrap="square" lIns="45720" rIns="45720" anchor="ctr">
             <a:spAutoFit/>
           </a:bodyPr>
           <a:lstStyle/>
@@ -8474,6 +8544,7 @@
           <a:lstStyle/>
           <a:p>
             <a:pPr algn="ctr"/>
+            <a:endParaRPr/>
           </a:p>
         </p:txBody>
       </p:sp>
@@ -8494,7 +8565,7 @@
           <a:noFill/>
         </p:spPr>
         <p:txBody>
-          <a:bodyPr wrap="square" anchor="ctr" lIns="45720" rIns="45720">
+          <a:bodyPr wrap="square" lIns="45720" rIns="45720" anchor="ctr">
             <a:spAutoFit/>
           </a:bodyPr>
           <a:lstStyle/>
@@ -8553,6 +8624,7 @@
           <a:lstStyle/>
           <a:p>
             <a:pPr algn="ctr"/>
+            <a:endParaRPr/>
           </a:p>
         </p:txBody>
       </p:sp>
@@ -8573,7 +8645,7 @@
           <a:noFill/>
         </p:spPr>
         <p:txBody>
-          <a:bodyPr wrap="square" anchor="t" lIns="45720" rIns="45720">
+          <a:bodyPr wrap="square" lIns="45720" rIns="45720" anchor="t">
             <a:spAutoFit/>
           </a:bodyPr>
           <a:lstStyle/>
@@ -8632,6 +8704,7 @@
           <a:lstStyle/>
           <a:p>
             <a:pPr algn="ctr"/>
+            <a:endParaRPr/>
           </a:p>
         </p:txBody>
       </p:sp>
@@ -8652,7 +8725,7 @@
           <a:noFill/>
         </p:spPr>
         <p:txBody>
-          <a:bodyPr wrap="square" anchor="ctr" lIns="45720" rIns="45720">
+          <a:bodyPr wrap="square" lIns="45720" rIns="45720" anchor="ctr">
             <a:spAutoFit/>
           </a:bodyPr>
           <a:lstStyle/>
@@ -8687,7 +8760,7 @@
           <a:noFill/>
         </p:spPr>
         <p:txBody>
-          <a:bodyPr wrap="square" anchor="t" lIns="45720" rIns="45720">
+          <a:bodyPr wrap="square" lIns="45720" rIns="45720" anchor="t">
             <a:spAutoFit/>
           </a:bodyPr>
           <a:lstStyle/>
@@ -8722,7 +8795,7 @@
           <a:noFill/>
         </p:spPr>
         <p:txBody>
-          <a:bodyPr wrap="square" anchor="t" lIns="45720" rIns="45720">
+          <a:bodyPr wrap="square" lIns="45720" rIns="45720" anchor="t">
             <a:spAutoFit/>
           </a:bodyPr>
           <a:lstStyle/>
@@ -8749,7 +8822,7 @@
 </file>
 
 <file path=ppt/slides/slide15.xml><?xml version="1.0" encoding="utf-8"?>
-<p:sld xmlns:a="http://schemas.openxmlformats.org/drawingml/2006/main" xmlns:p="http://schemas.openxmlformats.org/presentationml/2006/main" xmlns:r="http://schemas.openxmlformats.org/officeDocument/2006/relationships">
+<p:sld xmlns:a="http://schemas.openxmlformats.org/drawingml/2006/main" xmlns:r="http://schemas.openxmlformats.org/officeDocument/2006/relationships" xmlns:p="http://schemas.openxmlformats.org/presentationml/2006/main">
   <p:cSld>
     <p:spTree>
       <p:nvGrpSpPr>
@@ -8757,7 +8830,14 @@
         <p:cNvGrpSpPr/>
         <p:nvPr/>
       </p:nvGrpSpPr>
-      <p:grpSpPr/>
+      <p:grpSpPr>
+        <a:xfrm>
+          <a:off x="0" y="0"/>
+          <a:ext cx="0" cy="0"/>
+          <a:chOff x="0" y="0"/>
+          <a:chExt cx="0" cy="0"/>
+        </a:xfrm>
+      </p:grpSpPr>
       <p:sp>
         <p:nvSpPr>
           <p:cNvPr id="2" name="Rectangle 1"/>
@@ -8799,6 +8879,7 @@
           <a:lstStyle/>
           <a:p>
             <a:pPr algn="ctr"/>
+            <a:endParaRPr/>
           </a:p>
         </p:txBody>
       </p:sp>
@@ -8819,7 +8900,7 @@
           <a:noFill/>
         </p:spPr>
         <p:txBody>
-          <a:bodyPr wrap="square" anchor="ctr" lIns="45720" rIns="45720">
+          <a:bodyPr wrap="square" lIns="45720" rIns="45720" anchor="ctr">
             <a:spAutoFit/>
           </a:bodyPr>
           <a:lstStyle/>
@@ -8878,6 +8959,7 @@
           <a:lstStyle/>
           <a:p>
             <a:pPr algn="ctr"/>
+            <a:endParaRPr/>
           </a:p>
         </p:txBody>
       </p:sp>
@@ -8922,6 +9004,7 @@
           <a:lstStyle/>
           <a:p>
             <a:pPr algn="ctr"/>
+            <a:endParaRPr/>
           </a:p>
         </p:txBody>
       </p:sp>
@@ -8942,7 +9025,7 @@
           <a:noFill/>
         </p:spPr>
         <p:txBody>
-          <a:bodyPr wrap="square" anchor="ctr" lIns="45720" rIns="45720">
+          <a:bodyPr wrap="square" lIns="45720" rIns="45720" anchor="ctr">
             <a:spAutoFit/>
           </a:bodyPr>
           <a:lstStyle/>
@@ -9001,6 +9084,7 @@
           <a:lstStyle/>
           <a:p>
             <a:pPr algn="ctr"/>
+            <a:endParaRPr/>
           </a:p>
         </p:txBody>
       </p:sp>
@@ -9021,7 +9105,7 @@
           <a:noFill/>
         </p:spPr>
         <p:txBody>
-          <a:bodyPr wrap="square" anchor="t" lIns="45720" rIns="45720">
+          <a:bodyPr wrap="square" lIns="45720" rIns="45720" anchor="t">
             <a:spAutoFit/>
           </a:bodyPr>
           <a:lstStyle/>
@@ -9104,6 +9188,7 @@
           <a:lstStyle/>
           <a:p>
             <a:pPr algn="ctr"/>
+            <a:endParaRPr/>
           </a:p>
         </p:txBody>
       </p:sp>
@@ -9124,7 +9209,7 @@
           <a:noFill/>
         </p:spPr>
         <p:txBody>
-          <a:bodyPr wrap="square" anchor="ctr" lIns="45720" rIns="45720">
+          <a:bodyPr wrap="square" lIns="45720" rIns="45720" anchor="ctr">
             <a:spAutoFit/>
           </a:bodyPr>
           <a:lstStyle/>
@@ -9183,6 +9268,7 @@
           <a:lstStyle/>
           <a:p>
             <a:pPr algn="ctr"/>
+            <a:endParaRPr/>
           </a:p>
         </p:txBody>
       </p:sp>
@@ -9203,7 +9289,7 @@
           <a:noFill/>
         </p:spPr>
         <p:txBody>
-          <a:bodyPr wrap="square" anchor="t" lIns="45720" rIns="45720">
+          <a:bodyPr wrap="square" lIns="45720" rIns="45720" anchor="t">
             <a:spAutoFit/>
           </a:bodyPr>
           <a:lstStyle/>
@@ -9274,6 +9360,7 @@
           <a:lstStyle/>
           <a:p>
             <a:pPr algn="ctr"/>
+            <a:endParaRPr/>
           </a:p>
         </p:txBody>
       </p:sp>
@@ -9294,7 +9381,7 @@
           <a:noFill/>
         </p:spPr>
         <p:txBody>
-          <a:bodyPr wrap="square" anchor="ctr" lIns="45720" rIns="45720">
+          <a:bodyPr wrap="square" lIns="45720" rIns="45720" anchor="ctr">
             <a:spAutoFit/>
           </a:bodyPr>
           <a:lstStyle/>
@@ -9353,6 +9440,7 @@
           <a:lstStyle/>
           <a:p>
             <a:pPr algn="ctr"/>
+            <a:endParaRPr/>
           </a:p>
         </p:txBody>
       </p:sp>
@@ -9373,7 +9461,7 @@
           <a:noFill/>
         </p:spPr>
         <p:txBody>
-          <a:bodyPr wrap="square" anchor="t" lIns="45720" rIns="45720">
+          <a:bodyPr wrap="square" lIns="45720" rIns="45720" anchor="t">
             <a:spAutoFit/>
           </a:bodyPr>
           <a:lstStyle/>
@@ -9444,6 +9532,7 @@
           <a:lstStyle/>
           <a:p>
             <a:pPr algn="ctr"/>
+            <a:endParaRPr/>
           </a:p>
         </p:txBody>
       </p:sp>
@@ -9464,7 +9553,7 @@
           <a:noFill/>
         </p:spPr>
         <p:txBody>
-          <a:bodyPr wrap="square" anchor="ctr" lIns="45720" rIns="45720">
+          <a:bodyPr wrap="square" lIns="45720" rIns="45720" anchor="ctr">
             <a:spAutoFit/>
           </a:bodyPr>
           <a:lstStyle/>
@@ -9499,7 +9588,7 @@
           <a:noFill/>
         </p:spPr>
         <p:txBody>
-          <a:bodyPr wrap="square" anchor="t" lIns="45720" rIns="45720">
+          <a:bodyPr wrap="square" lIns="45720" rIns="45720" anchor="t">
             <a:spAutoFit/>
           </a:bodyPr>
           <a:lstStyle/>
@@ -9526,7 +9615,7 @@
 </file>
 
 <file path=ppt/slides/slide16.xml><?xml version="1.0" encoding="utf-8"?>
-<p:sld xmlns:a="http://schemas.openxmlformats.org/drawingml/2006/main" xmlns:p="http://schemas.openxmlformats.org/presentationml/2006/main" xmlns:r="http://schemas.openxmlformats.org/officeDocument/2006/relationships">
+<p:sld xmlns:a="http://schemas.openxmlformats.org/drawingml/2006/main" xmlns:r="http://schemas.openxmlformats.org/officeDocument/2006/relationships" xmlns:p="http://schemas.openxmlformats.org/presentationml/2006/main">
   <p:cSld>
     <p:spTree>
       <p:nvGrpSpPr>
@@ -9534,7 +9623,14 @@
         <p:cNvGrpSpPr/>
         <p:nvPr/>
       </p:nvGrpSpPr>
-      <p:grpSpPr/>
+      <p:grpSpPr>
+        <a:xfrm>
+          <a:off x="0" y="0"/>
+          <a:ext cx="0" cy="0"/>
+          <a:chOff x="0" y="0"/>
+          <a:chExt cx="0" cy="0"/>
+        </a:xfrm>
+      </p:grpSpPr>
       <p:sp>
         <p:nvSpPr>
           <p:cNvPr id="2" name="Rectangle 1"/>
@@ -9576,6 +9672,7 @@
           <a:lstStyle/>
           <a:p>
             <a:pPr algn="ctr"/>
+            <a:endParaRPr/>
           </a:p>
         </p:txBody>
       </p:sp>
@@ -9596,7 +9693,7 @@
           <a:noFill/>
         </p:spPr>
         <p:txBody>
-          <a:bodyPr wrap="square" anchor="ctr" lIns="45720" rIns="45720">
+          <a:bodyPr wrap="square" lIns="45720" rIns="45720" anchor="ctr">
             <a:spAutoFit/>
           </a:bodyPr>
           <a:lstStyle/>
@@ -9655,6 +9752,7 @@
           <a:lstStyle/>
           <a:p>
             <a:pPr algn="ctr"/>
+            <a:endParaRPr/>
           </a:p>
         </p:txBody>
       </p:sp>
@@ -9699,6 +9797,7 @@
           <a:lstStyle/>
           <a:p>
             <a:pPr algn="ctr"/>
+            <a:endParaRPr/>
           </a:p>
         </p:txBody>
       </p:sp>
@@ -9719,7 +9818,7 @@
           <a:noFill/>
         </p:spPr>
         <p:txBody>
-          <a:bodyPr wrap="square" anchor="t" lIns="45720" rIns="45720">
+          <a:bodyPr wrap="square" lIns="45720" rIns="45720" anchor="t">
             <a:spAutoFit/>
           </a:bodyPr>
           <a:lstStyle/>
@@ -9754,7 +9853,7 @@
           <a:noFill/>
         </p:spPr>
         <p:txBody>
-          <a:bodyPr wrap="square" anchor="t" lIns="45720" rIns="45720">
+          <a:bodyPr wrap="square" lIns="45720" rIns="45720" anchor="t">
             <a:spAutoFit/>
           </a:bodyPr>
           <a:lstStyle/>
@@ -9789,7 +9888,7 @@
           <a:noFill/>
         </p:spPr>
         <p:txBody>
-          <a:bodyPr wrap="square" anchor="t" lIns="45720" rIns="45720">
+          <a:bodyPr wrap="square" lIns="45720" rIns="45720" anchor="t">
             <a:spAutoFit/>
           </a:bodyPr>
           <a:lstStyle/>
@@ -9824,7 +9923,7 @@
           <a:noFill/>
         </p:spPr>
         <p:txBody>
-          <a:bodyPr wrap="square" anchor="t" lIns="45720" rIns="45720">
+          <a:bodyPr wrap="square" lIns="45720" rIns="45720" anchor="t">
             <a:spAutoFit/>
           </a:bodyPr>
           <a:lstStyle/>
@@ -9859,7 +9958,7 @@
           <a:noFill/>
         </p:spPr>
         <p:txBody>
-          <a:bodyPr wrap="square" anchor="t" lIns="45720" rIns="45720">
+          <a:bodyPr wrap="square" lIns="45720" rIns="45720" anchor="t">
             <a:spAutoFit/>
           </a:bodyPr>
           <a:lstStyle/>
@@ -9894,7 +9993,7 @@
           <a:noFill/>
         </p:spPr>
         <p:txBody>
-          <a:bodyPr wrap="square" anchor="t" lIns="45720" rIns="45720">
+          <a:bodyPr wrap="square" lIns="45720" rIns="45720" anchor="t">
             <a:spAutoFit/>
           </a:bodyPr>
           <a:lstStyle/>
@@ -9929,7 +10028,7 @@
           <a:noFill/>
         </p:spPr>
         <p:txBody>
-          <a:bodyPr wrap="square" anchor="t" lIns="45720" rIns="45720">
+          <a:bodyPr wrap="square" lIns="45720" rIns="45720" anchor="t">
             <a:spAutoFit/>
           </a:bodyPr>
           <a:lstStyle/>
@@ -9964,7 +10063,7 @@
           <a:noFill/>
         </p:spPr>
         <p:txBody>
-          <a:bodyPr wrap="square" anchor="t" lIns="45720" rIns="45720">
+          <a:bodyPr wrap="square" lIns="45720" rIns="45720" anchor="t">
             <a:spAutoFit/>
           </a:bodyPr>
           <a:lstStyle/>
@@ -10023,6 +10122,7 @@
           <a:lstStyle/>
           <a:p>
             <a:pPr algn="ctr"/>
+            <a:endParaRPr/>
           </a:p>
         </p:txBody>
       </p:sp>
@@ -10043,7 +10143,7 @@
           <a:noFill/>
         </p:spPr>
         <p:txBody>
-          <a:bodyPr wrap="square" anchor="t" lIns="45720" rIns="45720">
+          <a:bodyPr wrap="square" lIns="45720" rIns="45720" anchor="t">
             <a:spAutoFit/>
           </a:bodyPr>
           <a:lstStyle/>
@@ -10078,7 +10178,7 @@
           <a:noFill/>
         </p:spPr>
         <p:txBody>
-          <a:bodyPr wrap="square" anchor="t" lIns="45720" rIns="45720">
+          <a:bodyPr wrap="square" lIns="45720" rIns="45720" anchor="t">
             <a:spAutoFit/>
           </a:bodyPr>
           <a:lstStyle/>
@@ -10113,7 +10213,7 @@
           <a:noFill/>
         </p:spPr>
         <p:txBody>
-          <a:bodyPr wrap="square" anchor="t" lIns="45720" rIns="45720">
+          <a:bodyPr wrap="square" lIns="45720" rIns="45720" anchor="t">
             <a:spAutoFit/>
           </a:bodyPr>
           <a:lstStyle/>
@@ -10148,7 +10248,7 @@
           <a:noFill/>
         </p:spPr>
         <p:txBody>
-          <a:bodyPr wrap="square" anchor="t" lIns="45720" rIns="45720">
+          <a:bodyPr wrap="square" lIns="45720" rIns="45720" anchor="t">
             <a:spAutoFit/>
           </a:bodyPr>
           <a:lstStyle/>
@@ -10183,7 +10283,7 @@
           <a:noFill/>
         </p:spPr>
         <p:txBody>
-          <a:bodyPr wrap="square" anchor="t" lIns="45720" rIns="45720">
+          <a:bodyPr wrap="square" lIns="45720" rIns="45720" anchor="t">
             <a:spAutoFit/>
           </a:bodyPr>
           <a:lstStyle/>
@@ -10218,21 +10318,13 @@
           <a:noFill/>
         </p:spPr>
         <p:txBody>
-          <a:bodyPr wrap="square" anchor="t" lIns="45720" rIns="45720">
+          <a:bodyPr wrap="square" lIns="45720" rIns="45720" anchor="t">
             <a:spAutoFit/>
           </a:bodyPr>
           <a:lstStyle/>
           <a:p>
             <a:pPr algn="l"/>
-            <a:r>
-              <a:rPr sz="1200" b="0" i="0">
-                <a:solidFill>
-                  <a:srgbClr val="1F3A68"/>
-                </a:solidFill>
-                <a:latin typeface="Calibri"/>
-              </a:rPr>
-              <a:t/>
-            </a:r>
+            <a:endParaRPr/>
           </a:p>
         </p:txBody>
       </p:sp>
@@ -10253,7 +10345,7 @@
           <a:noFill/>
         </p:spPr>
         <p:txBody>
-          <a:bodyPr wrap="square" anchor="t" lIns="45720" rIns="45720">
+          <a:bodyPr wrap="square" lIns="45720" rIns="45720" anchor="t">
             <a:spAutoFit/>
           </a:bodyPr>
           <a:lstStyle/>
@@ -10288,7 +10380,7 @@
           <a:noFill/>
         </p:spPr>
         <p:txBody>
-          <a:bodyPr wrap="square" anchor="t" lIns="45720" rIns="45720">
+          <a:bodyPr wrap="square" lIns="45720" rIns="45720" anchor="t">
             <a:spAutoFit/>
           </a:bodyPr>
           <a:lstStyle/>
@@ -10323,7 +10415,7 @@
           <a:noFill/>
         </p:spPr>
         <p:txBody>
-          <a:bodyPr wrap="square" anchor="t" lIns="45720" rIns="45720">
+          <a:bodyPr wrap="square" lIns="45720" rIns="45720" anchor="t">
             <a:spAutoFit/>
           </a:bodyPr>
           <a:lstStyle/>
@@ -10358,7 +10450,7 @@
           <a:noFill/>
         </p:spPr>
         <p:txBody>
-          <a:bodyPr wrap="square" anchor="t" lIns="45720" rIns="45720">
+          <a:bodyPr wrap="square" lIns="45720" rIns="45720" anchor="t">
             <a:spAutoFit/>
           </a:bodyPr>
           <a:lstStyle/>
@@ -10393,7 +10485,7 @@
           <a:noFill/>
         </p:spPr>
         <p:txBody>
-          <a:bodyPr wrap="square" anchor="t" lIns="45720" rIns="45720">
+          <a:bodyPr wrap="square" lIns="45720" rIns="45720" anchor="t">
             <a:spAutoFit/>
           </a:bodyPr>
           <a:lstStyle/>
@@ -10428,7 +10520,7 @@
           <a:noFill/>
         </p:spPr>
         <p:txBody>
-          <a:bodyPr wrap="square" anchor="t" lIns="45720" rIns="45720">
+          <a:bodyPr wrap="square" lIns="45720" rIns="45720" anchor="t">
             <a:spAutoFit/>
           </a:bodyPr>
           <a:lstStyle/>
@@ -10455,7 +10547,7 @@
 </file>
 
 <file path=ppt/slides/slide17.xml><?xml version="1.0" encoding="utf-8"?>
-<p:sld xmlns:a="http://schemas.openxmlformats.org/drawingml/2006/main" xmlns:p="http://schemas.openxmlformats.org/presentationml/2006/main" xmlns:r="http://schemas.openxmlformats.org/officeDocument/2006/relationships">
+<p:sld xmlns:a="http://schemas.openxmlformats.org/drawingml/2006/main" xmlns:r="http://schemas.openxmlformats.org/officeDocument/2006/relationships" xmlns:p="http://schemas.openxmlformats.org/presentationml/2006/main">
   <p:cSld>
     <p:spTree>
       <p:nvGrpSpPr>
@@ -10463,7 +10555,14 @@
         <p:cNvGrpSpPr/>
         <p:nvPr/>
       </p:nvGrpSpPr>
-      <p:grpSpPr/>
+      <p:grpSpPr>
+        <a:xfrm>
+          <a:off x="0" y="0"/>
+          <a:ext cx="0" cy="0"/>
+          <a:chOff x="0" y="0"/>
+          <a:chExt cx="0" cy="0"/>
+        </a:xfrm>
+      </p:grpSpPr>
       <p:sp>
         <p:nvSpPr>
           <p:cNvPr id="2" name="Rectangle 1"/>
@@ -10505,6 +10604,7 @@
           <a:lstStyle/>
           <a:p>
             <a:pPr algn="ctr"/>
+            <a:endParaRPr/>
           </a:p>
         </p:txBody>
       </p:sp>
@@ -10549,6 +10649,7 @@
           <a:lstStyle/>
           <a:p>
             <a:pPr algn="ctr"/>
+            <a:endParaRPr/>
           </a:p>
         </p:txBody>
       </p:sp>
@@ -10569,7 +10670,7 @@
           <a:noFill/>
         </p:spPr>
         <p:txBody>
-          <a:bodyPr wrap="square" anchor="t" lIns="45720" rIns="45720">
+          <a:bodyPr wrap="square" lIns="45720" rIns="45720" anchor="t">
             <a:spAutoFit/>
           </a:bodyPr>
           <a:lstStyle/>
@@ -10604,7 +10705,7 @@
           <a:noFill/>
         </p:spPr>
         <p:txBody>
-          <a:bodyPr wrap="square" anchor="t" lIns="45720" rIns="45720">
+          <a:bodyPr wrap="square" lIns="45720" rIns="45720" anchor="t">
             <a:spAutoFit/>
           </a:bodyPr>
           <a:lstStyle/>
@@ -10639,7 +10740,7 @@
           <a:noFill/>
         </p:spPr>
         <p:txBody>
-          <a:bodyPr wrap="square" anchor="t" lIns="45720" rIns="45720">
+          <a:bodyPr wrap="square" lIns="45720" rIns="45720" anchor="t">
             <a:spAutoFit/>
           </a:bodyPr>
           <a:lstStyle/>
@@ -10674,7 +10775,7 @@
           <a:noFill/>
         </p:spPr>
         <p:txBody>
-          <a:bodyPr wrap="square" anchor="t" lIns="45720" rIns="45720">
+          <a:bodyPr wrap="square" lIns="45720" rIns="45720" anchor="t">
             <a:spAutoFit/>
           </a:bodyPr>
           <a:lstStyle/>
@@ -10701,28 +10802,64 @@
         <p:spPr>
           <a:xfrm>
             <a:off x="640080" y="5577840"/>
-            <a:ext cx="10908792" cy="365760"/>
-          </a:xfrm>
-          <a:prstGeom prst="rect">
-            <a:avLst/>
-          </a:prstGeom>
-          <a:noFill/>
-        </p:spPr>
-        <p:txBody>
-          <a:bodyPr wrap="square" anchor="t" lIns="45720" rIns="45720">
+            <a:ext cx="10908792" cy="292388"/>
+          </a:xfrm>
+          <a:prstGeom prst="rect">
+            <a:avLst/>
+          </a:prstGeom>
+          <a:noFill/>
+        </p:spPr>
+        <p:txBody>
+          <a:bodyPr wrap="square" lIns="45720" rIns="45720" anchor="t">
             <a:spAutoFit/>
           </a:bodyPr>
           <a:lstStyle/>
           <a:p>
             <a:pPr algn="l"/>
             <a:r>
+              <a:rPr sz="1300" b="0" i="0" dirty="0">
+                <a:solidFill>
+                  <a:srgbClr val="FFFFFF"/>
+                </a:solidFill>
+                <a:latin typeface="Calibri"/>
+              </a:rPr>
+              <a:t>Carlos Alberto Moreno David · Juan Esteban García Ocampo · Emiliano </a:t>
+            </a:r>
+            <a:r>
+              <a:rPr sz="1300" b="0" i="0" dirty="0" err="1">
+                <a:solidFill>
+                  <a:srgbClr val="FFFFFF"/>
+                </a:solidFill>
+                <a:latin typeface="Calibri"/>
+              </a:rPr>
+              <a:t>Vélez</a:t>
+            </a:r>
+            <a:r>
+              <a:rPr sz="1300" b="0" i="0" dirty="0">
+                <a:solidFill>
+                  <a:srgbClr val="FFFFFF"/>
+                </a:solidFill>
+                <a:latin typeface="Calibri"/>
+              </a:rPr>
+              <a:t> Suárez · Sebastián </a:t>
+            </a:r>
+            <a:r>
               <a:rPr sz="1300" b="0" i="0">
                 <a:solidFill>
                   <a:srgbClr val="FFFFFF"/>
                 </a:solidFill>
                 <a:latin typeface="Calibri"/>
               </a:rPr>
-              <a:t>Carlos Alberto Moreno David · Juan Esteban García Ocampo · Emiliano Vélez Suárez · Sebastián Ciro Medellín · admmoreno.david@gmail.com · Mayo 2026</a:t>
+              <a:t>Ciro Medellín </a:t>
+            </a:r>
+            <a:r>
+              <a:rPr sz="1300" b="0" i="0" dirty="0">
+                <a:solidFill>
+                  <a:srgbClr val="FFFFFF"/>
+                </a:solidFill>
+                <a:latin typeface="Calibri"/>
+              </a:rPr>
+              <a:t>· Mayo 2026</a:t>
             </a:r>
           </a:p>
         </p:txBody>
@@ -10736,7 +10873,7 @@
 </file>
 
 <file path=ppt/slides/slide2.xml><?xml version="1.0" encoding="utf-8"?>
-<p:sld xmlns:a="http://schemas.openxmlformats.org/drawingml/2006/main" xmlns:p="http://schemas.openxmlformats.org/presentationml/2006/main" xmlns:r="http://schemas.openxmlformats.org/officeDocument/2006/relationships">
+<p:sld xmlns:a="http://schemas.openxmlformats.org/drawingml/2006/main" xmlns:r="http://schemas.openxmlformats.org/officeDocument/2006/relationships" xmlns:p="http://schemas.openxmlformats.org/presentationml/2006/main">
   <p:cSld>
     <p:spTree>
       <p:nvGrpSpPr>
@@ -10744,7 +10881,14 @@
         <p:cNvGrpSpPr/>
         <p:nvPr/>
       </p:nvGrpSpPr>
-      <p:grpSpPr/>
+      <p:grpSpPr>
+        <a:xfrm>
+          <a:off x="0" y="0"/>
+          <a:ext cx="0" cy="0"/>
+          <a:chOff x="0" y="0"/>
+          <a:chExt cx="0" cy="0"/>
+        </a:xfrm>
+      </p:grpSpPr>
       <p:sp>
         <p:nvSpPr>
           <p:cNvPr id="2" name="Rectangle 1"/>
@@ -10786,6 +10930,7 @@
           <a:lstStyle/>
           <a:p>
             <a:pPr algn="ctr"/>
+            <a:endParaRPr/>
           </a:p>
         </p:txBody>
       </p:sp>
@@ -10806,7 +10951,7 @@
           <a:noFill/>
         </p:spPr>
         <p:txBody>
-          <a:bodyPr wrap="square" anchor="ctr" lIns="45720" rIns="45720">
+          <a:bodyPr wrap="square" lIns="45720" rIns="45720" anchor="ctr">
             <a:spAutoFit/>
           </a:bodyPr>
           <a:lstStyle/>
@@ -10865,6 +11010,7 @@
           <a:lstStyle/>
           <a:p>
             <a:pPr algn="ctr"/>
+            <a:endParaRPr/>
           </a:p>
         </p:txBody>
       </p:sp>
@@ -10909,6 +11055,7 @@
           <a:lstStyle/>
           <a:p>
             <a:pPr algn="ctr"/>
+            <a:endParaRPr/>
           </a:p>
         </p:txBody>
       </p:sp>
@@ -10929,7 +11076,7 @@
           <a:noFill/>
         </p:spPr>
         <p:txBody>
-          <a:bodyPr wrap="square" anchor="t" lIns="45720" rIns="45720">
+          <a:bodyPr wrap="square" lIns="45720" rIns="45720" anchor="t">
             <a:spAutoFit/>
           </a:bodyPr>
           <a:lstStyle/>
@@ -10988,6 +11135,7 @@
           <a:lstStyle/>
           <a:p>
             <a:pPr algn="ctr"/>
+            <a:endParaRPr/>
           </a:p>
         </p:txBody>
       </p:sp>
@@ -11008,7 +11156,7 @@
           <a:noFill/>
         </p:spPr>
         <p:txBody>
-          <a:bodyPr wrap="square" anchor="t" lIns="45720" rIns="45720">
+          <a:bodyPr wrap="square" lIns="45720" rIns="45720" anchor="t">
             <a:spAutoFit/>
           </a:bodyPr>
           <a:lstStyle/>
@@ -11067,6 +11215,7 @@
           <a:lstStyle/>
           <a:p>
             <a:pPr algn="ctr"/>
+            <a:endParaRPr/>
           </a:p>
         </p:txBody>
       </p:sp>
@@ -11087,7 +11236,7 @@
           <a:noFill/>
         </p:spPr>
         <p:txBody>
-          <a:bodyPr wrap="square" anchor="t" lIns="45720" rIns="45720">
+          <a:bodyPr wrap="square" lIns="45720" rIns="45720" anchor="t">
             <a:spAutoFit/>
           </a:bodyPr>
           <a:lstStyle/>
@@ -11146,6 +11295,7 @@
           <a:lstStyle/>
           <a:p>
             <a:pPr algn="ctr"/>
+            <a:endParaRPr/>
           </a:p>
         </p:txBody>
       </p:sp>
@@ -11166,7 +11316,7 @@
           <a:noFill/>
         </p:spPr>
         <p:txBody>
-          <a:bodyPr wrap="square" anchor="t" lIns="45720" rIns="45720">
+          <a:bodyPr wrap="square" lIns="45720" rIns="45720" anchor="t">
             <a:spAutoFit/>
           </a:bodyPr>
           <a:lstStyle/>
@@ -11225,6 +11375,7 @@
           <a:lstStyle/>
           <a:p>
             <a:pPr algn="ctr"/>
+            <a:endParaRPr/>
           </a:p>
         </p:txBody>
       </p:sp>
@@ -11245,7 +11396,7 @@
           <a:noFill/>
         </p:spPr>
         <p:txBody>
-          <a:bodyPr wrap="square" anchor="t" lIns="45720" rIns="45720">
+          <a:bodyPr wrap="square" lIns="45720" rIns="45720" anchor="t">
             <a:spAutoFit/>
           </a:bodyPr>
           <a:lstStyle/>
@@ -11304,6 +11455,7 @@
           <a:lstStyle/>
           <a:p>
             <a:pPr algn="ctr"/>
+            <a:endParaRPr/>
           </a:p>
         </p:txBody>
       </p:sp>
@@ -11324,7 +11476,7 @@
           <a:noFill/>
         </p:spPr>
         <p:txBody>
-          <a:bodyPr wrap="square" anchor="t" lIns="45720" rIns="45720">
+          <a:bodyPr wrap="square" lIns="45720" rIns="45720" anchor="t">
             <a:spAutoFit/>
           </a:bodyPr>
           <a:lstStyle/>
@@ -11383,6 +11535,7 @@
           <a:lstStyle/>
           <a:p>
             <a:pPr algn="ctr"/>
+            <a:endParaRPr/>
           </a:p>
         </p:txBody>
       </p:sp>
@@ -11403,7 +11556,7 @@
           <a:noFill/>
         </p:spPr>
         <p:txBody>
-          <a:bodyPr wrap="square" anchor="t" lIns="45720" rIns="45720">
+          <a:bodyPr wrap="square" lIns="45720" rIns="45720" anchor="t">
             <a:spAutoFit/>
           </a:bodyPr>
           <a:lstStyle/>
@@ -11462,6 +11615,7 @@
           <a:lstStyle/>
           <a:p>
             <a:pPr algn="ctr"/>
+            <a:endParaRPr/>
           </a:p>
         </p:txBody>
       </p:sp>
@@ -11482,7 +11636,7 @@
           <a:noFill/>
         </p:spPr>
         <p:txBody>
-          <a:bodyPr wrap="square" anchor="t" lIns="45720" rIns="45720">
+          <a:bodyPr wrap="square" lIns="45720" rIns="45720" anchor="t">
             <a:spAutoFit/>
           </a:bodyPr>
           <a:lstStyle/>
@@ -11517,7 +11671,7 @@
           <a:noFill/>
         </p:spPr>
         <p:txBody>
-          <a:bodyPr wrap="square" anchor="t" lIns="45720" rIns="45720">
+          <a:bodyPr wrap="square" lIns="45720" rIns="45720" anchor="t">
             <a:spAutoFit/>
           </a:bodyPr>
           <a:lstStyle/>
@@ -11544,7 +11698,7 @@
 </file>
 
 <file path=ppt/slides/slide3.xml><?xml version="1.0" encoding="utf-8"?>
-<p:sld xmlns:a="http://schemas.openxmlformats.org/drawingml/2006/main" xmlns:p="http://schemas.openxmlformats.org/presentationml/2006/main" xmlns:r="http://schemas.openxmlformats.org/officeDocument/2006/relationships">
+<p:sld xmlns:a="http://schemas.openxmlformats.org/drawingml/2006/main" xmlns:r="http://schemas.openxmlformats.org/officeDocument/2006/relationships" xmlns:p="http://schemas.openxmlformats.org/presentationml/2006/main">
   <p:cSld>
     <p:spTree>
       <p:nvGrpSpPr>
@@ -11552,7 +11706,14 @@
         <p:cNvGrpSpPr/>
         <p:nvPr/>
       </p:nvGrpSpPr>
-      <p:grpSpPr/>
+      <p:grpSpPr>
+        <a:xfrm>
+          <a:off x="0" y="0"/>
+          <a:ext cx="0" cy="0"/>
+          <a:chOff x="0" y="0"/>
+          <a:chExt cx="0" cy="0"/>
+        </a:xfrm>
+      </p:grpSpPr>
       <p:sp>
         <p:nvSpPr>
           <p:cNvPr id="2" name="Rectangle 1"/>
@@ -11594,6 +11755,7 @@
           <a:lstStyle/>
           <a:p>
             <a:pPr algn="ctr"/>
+            <a:endParaRPr/>
           </a:p>
         </p:txBody>
       </p:sp>
@@ -11614,7 +11776,7 @@
           <a:noFill/>
         </p:spPr>
         <p:txBody>
-          <a:bodyPr wrap="square" anchor="ctr" lIns="45720" rIns="45720">
+          <a:bodyPr wrap="square" lIns="45720" rIns="45720" anchor="ctr">
             <a:spAutoFit/>
           </a:bodyPr>
           <a:lstStyle/>
@@ -11673,6 +11835,7 @@
           <a:lstStyle/>
           <a:p>
             <a:pPr algn="ctr"/>
+            <a:endParaRPr/>
           </a:p>
         </p:txBody>
       </p:sp>
@@ -11693,7 +11856,7 @@
           <a:noFill/>
         </p:spPr>
         <p:txBody>
-          <a:bodyPr wrap="square" anchor="t" lIns="45720" rIns="45720">
+          <a:bodyPr wrap="square" lIns="45720" rIns="45720" anchor="t">
             <a:spAutoFit/>
           </a:bodyPr>
           <a:lstStyle/>
@@ -11728,7 +11891,7 @@
           <a:noFill/>
         </p:spPr>
         <p:txBody>
-          <a:bodyPr wrap="square" anchor="t" lIns="45720" rIns="45720">
+          <a:bodyPr wrap="square" lIns="45720" rIns="45720" anchor="t">
             <a:spAutoFit/>
           </a:bodyPr>
           <a:lstStyle/>
@@ -11787,6 +11950,7 @@
           <a:lstStyle/>
           <a:p>
             <a:pPr algn="ctr"/>
+            <a:endParaRPr/>
           </a:p>
         </p:txBody>
       </p:sp>
@@ -11807,7 +11971,7 @@
           <a:noFill/>
         </p:spPr>
         <p:txBody>
-          <a:bodyPr wrap="square" anchor="t" lIns="45720" rIns="45720">
+          <a:bodyPr wrap="square" lIns="45720" rIns="45720" anchor="t">
             <a:spAutoFit/>
           </a:bodyPr>
           <a:lstStyle/>
@@ -11842,7 +12006,7 @@
           <a:noFill/>
         </p:spPr>
         <p:txBody>
-          <a:bodyPr wrap="square" anchor="t" lIns="45720" rIns="45720">
+          <a:bodyPr wrap="square" lIns="45720" rIns="45720" anchor="t">
             <a:spAutoFit/>
           </a:bodyPr>
           <a:lstStyle/>
@@ -11877,7 +12041,7 @@
           <a:noFill/>
         </p:spPr>
         <p:txBody>
-          <a:bodyPr wrap="square" anchor="t" lIns="45720" rIns="45720">
+          <a:bodyPr wrap="square" lIns="45720" rIns="45720" anchor="t">
             <a:spAutoFit/>
           </a:bodyPr>
           <a:lstStyle/>
@@ -11912,7 +12076,7 @@
           <a:noFill/>
         </p:spPr>
         <p:txBody>
-          <a:bodyPr wrap="square" anchor="t" lIns="45720" rIns="45720">
+          <a:bodyPr wrap="square" lIns="45720" rIns="45720" anchor="t">
             <a:spAutoFit/>
           </a:bodyPr>
           <a:lstStyle/>
@@ -11947,7 +12111,7 @@
           <a:noFill/>
         </p:spPr>
         <p:txBody>
-          <a:bodyPr wrap="square" anchor="t" lIns="45720" rIns="45720">
+          <a:bodyPr wrap="square" lIns="45720" rIns="45720" anchor="t">
             <a:spAutoFit/>
           </a:bodyPr>
           <a:lstStyle/>
@@ -11982,7 +12146,7 @@
           <a:noFill/>
         </p:spPr>
         <p:txBody>
-          <a:bodyPr wrap="square" anchor="t" lIns="45720" rIns="45720">
+          <a:bodyPr wrap="square" lIns="45720" rIns="45720" anchor="t">
             <a:spAutoFit/>
           </a:bodyPr>
           <a:lstStyle/>
@@ -12017,7 +12181,7 @@
           <a:noFill/>
         </p:spPr>
         <p:txBody>
-          <a:bodyPr wrap="square" anchor="t" lIns="45720" rIns="45720">
+          <a:bodyPr wrap="square" lIns="45720" rIns="45720" anchor="t">
             <a:spAutoFit/>
           </a:bodyPr>
           <a:lstStyle/>
@@ -12052,7 +12216,7 @@
           <a:noFill/>
         </p:spPr>
         <p:txBody>
-          <a:bodyPr wrap="square" anchor="t" lIns="45720" rIns="45720">
+          <a:bodyPr wrap="square" lIns="45720" rIns="45720" anchor="t">
             <a:spAutoFit/>
           </a:bodyPr>
           <a:lstStyle/>
@@ -12111,6 +12275,7 @@
           <a:lstStyle/>
           <a:p>
             <a:pPr algn="ctr"/>
+            <a:endParaRPr/>
           </a:p>
         </p:txBody>
       </p:sp>
@@ -12131,7 +12296,7 @@
           <a:noFill/>
         </p:spPr>
         <p:txBody>
-          <a:bodyPr wrap="square" anchor="t" lIns="45720" rIns="45720">
+          <a:bodyPr wrap="square" lIns="45720" rIns="45720" anchor="t">
             <a:spAutoFit/>
           </a:bodyPr>
           <a:lstStyle/>
@@ -12166,7 +12331,7 @@
           <a:noFill/>
         </p:spPr>
         <p:txBody>
-          <a:bodyPr wrap="square" anchor="t" lIns="45720" rIns="45720">
+          <a:bodyPr wrap="square" lIns="45720" rIns="45720" anchor="t">
             <a:spAutoFit/>
           </a:bodyPr>
           <a:lstStyle/>
@@ -12201,7 +12366,7 @@
           <a:noFill/>
         </p:spPr>
         <p:txBody>
-          <a:bodyPr wrap="square" anchor="t" lIns="45720" rIns="45720">
+          <a:bodyPr wrap="square" lIns="45720" rIns="45720" anchor="t">
             <a:spAutoFit/>
           </a:bodyPr>
           <a:lstStyle/>
@@ -12236,7 +12401,7 @@
           <a:noFill/>
         </p:spPr>
         <p:txBody>
-          <a:bodyPr wrap="square" anchor="t" lIns="45720" rIns="45720">
+          <a:bodyPr wrap="square" lIns="45720" rIns="45720" anchor="t">
             <a:spAutoFit/>
           </a:bodyPr>
           <a:lstStyle/>
@@ -12271,7 +12436,7 @@
           <a:noFill/>
         </p:spPr>
         <p:txBody>
-          <a:bodyPr wrap="square" anchor="t" lIns="45720" rIns="45720">
+          <a:bodyPr wrap="square" lIns="45720" rIns="45720" anchor="t">
             <a:spAutoFit/>
           </a:bodyPr>
           <a:lstStyle/>
@@ -12306,7 +12471,7 @@
           <a:noFill/>
         </p:spPr>
         <p:txBody>
-          <a:bodyPr wrap="square" anchor="t" lIns="45720" rIns="45720">
+          <a:bodyPr wrap="square" lIns="45720" rIns="45720" anchor="t">
             <a:spAutoFit/>
           </a:bodyPr>
           <a:lstStyle/>
@@ -12341,7 +12506,7 @@
           <a:noFill/>
         </p:spPr>
         <p:txBody>
-          <a:bodyPr wrap="square" anchor="t" lIns="45720" rIns="45720">
+          <a:bodyPr wrap="square" lIns="45720" rIns="45720" anchor="t">
             <a:spAutoFit/>
           </a:bodyPr>
           <a:lstStyle/>
@@ -12376,7 +12541,7 @@
           <a:noFill/>
         </p:spPr>
         <p:txBody>
-          <a:bodyPr wrap="square" anchor="t" lIns="45720" rIns="45720">
+          <a:bodyPr wrap="square" lIns="45720" rIns="45720" anchor="t">
             <a:spAutoFit/>
           </a:bodyPr>
           <a:lstStyle/>
@@ -12411,7 +12576,7 @@
           <a:noFill/>
         </p:spPr>
         <p:txBody>
-          <a:bodyPr wrap="square" anchor="t" lIns="45720" rIns="45720">
+          <a:bodyPr wrap="square" lIns="45720" rIns="45720" anchor="t">
             <a:spAutoFit/>
           </a:bodyPr>
           <a:lstStyle/>
@@ -12438,7 +12603,7 @@
 </file>
 
 <file path=ppt/slides/slide4.xml><?xml version="1.0" encoding="utf-8"?>
-<p:sld xmlns:a="http://schemas.openxmlformats.org/drawingml/2006/main" xmlns:p="http://schemas.openxmlformats.org/presentationml/2006/main" xmlns:r="http://schemas.openxmlformats.org/officeDocument/2006/relationships">
+<p:sld xmlns:a="http://schemas.openxmlformats.org/drawingml/2006/main" xmlns:r="http://schemas.openxmlformats.org/officeDocument/2006/relationships" xmlns:p="http://schemas.openxmlformats.org/presentationml/2006/main">
   <p:cSld>
     <p:spTree>
       <p:nvGrpSpPr>
@@ -12446,7 +12611,14 @@
         <p:cNvGrpSpPr/>
         <p:nvPr/>
       </p:nvGrpSpPr>
-      <p:grpSpPr/>
+      <p:grpSpPr>
+        <a:xfrm>
+          <a:off x="0" y="0"/>
+          <a:ext cx="0" cy="0"/>
+          <a:chOff x="0" y="0"/>
+          <a:chExt cx="0" cy="0"/>
+        </a:xfrm>
+      </p:grpSpPr>
       <p:sp>
         <p:nvSpPr>
           <p:cNvPr id="2" name="Rectangle 1"/>
@@ -12488,6 +12660,7 @@
           <a:lstStyle/>
           <a:p>
             <a:pPr algn="ctr"/>
+            <a:endParaRPr/>
           </a:p>
         </p:txBody>
       </p:sp>
@@ -12508,7 +12681,7 @@
           <a:noFill/>
         </p:spPr>
         <p:txBody>
-          <a:bodyPr wrap="square" anchor="ctr" lIns="45720" rIns="45720">
+          <a:bodyPr wrap="square" lIns="45720" rIns="45720" anchor="ctr">
             <a:spAutoFit/>
           </a:bodyPr>
           <a:lstStyle/>
@@ -12567,6 +12740,7 @@
           <a:lstStyle/>
           <a:p>
             <a:pPr algn="ctr"/>
+            <a:endParaRPr/>
           </a:p>
         </p:txBody>
       </p:sp>
@@ -12587,7 +12761,7 @@
           <a:noFill/>
         </p:spPr>
         <p:txBody>
-          <a:bodyPr wrap="square" anchor="t" lIns="45720" rIns="45720">
+          <a:bodyPr wrap="square" lIns="45720" rIns="45720" anchor="t">
             <a:spAutoFit/>
           </a:bodyPr>
           <a:lstStyle/>
@@ -12646,6 +12820,7 @@
           <a:lstStyle/>
           <a:p>
             <a:pPr algn="ctr"/>
+            <a:endParaRPr/>
           </a:p>
         </p:txBody>
       </p:sp>
@@ -12666,7 +12841,7 @@
           <a:noFill/>
         </p:spPr>
         <p:txBody>
-          <a:bodyPr wrap="square" anchor="ctr" lIns="45720" rIns="45720">
+          <a:bodyPr wrap="square" lIns="45720" rIns="45720" anchor="ctr">
             <a:spAutoFit/>
           </a:bodyPr>
           <a:lstStyle/>
@@ -12725,6 +12900,7 @@
           <a:lstStyle/>
           <a:p>
             <a:pPr algn="ctr"/>
+            <a:endParaRPr/>
           </a:p>
         </p:txBody>
       </p:sp>
@@ -12745,7 +12921,7 @@
           <a:noFill/>
         </p:spPr>
         <p:txBody>
-          <a:bodyPr wrap="square" anchor="t" lIns="45720" rIns="45720">
+          <a:bodyPr wrap="square" lIns="45720" rIns="45720" anchor="t">
             <a:spAutoFit/>
           </a:bodyPr>
           <a:lstStyle/>
@@ -12792,7 +12968,7 @@
           <a:noFill/>
         </p:spPr>
         <p:txBody>
-          <a:bodyPr wrap="square" anchor="t" lIns="45720" rIns="45720">
+          <a:bodyPr wrap="square" lIns="45720" rIns="45720" anchor="t">
             <a:spAutoFit/>
           </a:bodyPr>
           <a:lstStyle/>
@@ -12863,6 +13039,7 @@
           <a:lstStyle/>
           <a:p>
             <a:pPr algn="ctr"/>
+            <a:endParaRPr/>
           </a:p>
         </p:txBody>
       </p:sp>
@@ -12883,7 +13060,7 @@
           <a:noFill/>
         </p:spPr>
         <p:txBody>
-          <a:bodyPr wrap="square" anchor="ctr" lIns="45720" rIns="45720">
+          <a:bodyPr wrap="square" lIns="45720" rIns="45720" anchor="ctr">
             <a:spAutoFit/>
           </a:bodyPr>
           <a:lstStyle/>
@@ -12942,6 +13119,7 @@
           <a:lstStyle/>
           <a:p>
             <a:pPr algn="ctr"/>
+            <a:endParaRPr/>
           </a:p>
         </p:txBody>
       </p:sp>
@@ -12962,7 +13140,7 @@
           <a:noFill/>
         </p:spPr>
         <p:txBody>
-          <a:bodyPr wrap="square" anchor="t" lIns="45720" rIns="45720">
+          <a:bodyPr wrap="square" lIns="45720" rIns="45720" anchor="t">
             <a:spAutoFit/>
           </a:bodyPr>
           <a:lstStyle/>
@@ -12997,7 +13175,7 @@
           <a:noFill/>
         </p:spPr>
         <p:txBody>
-          <a:bodyPr wrap="square" anchor="t" lIns="45720" rIns="45720">
+          <a:bodyPr wrap="square" lIns="45720" rIns="45720" anchor="t">
             <a:spAutoFit/>
           </a:bodyPr>
           <a:lstStyle/>
@@ -13068,6 +13246,7 @@
           <a:lstStyle/>
           <a:p>
             <a:pPr algn="ctr"/>
+            <a:endParaRPr/>
           </a:p>
         </p:txBody>
       </p:sp>
@@ -13088,7 +13267,7 @@
           <a:noFill/>
         </p:spPr>
         <p:txBody>
-          <a:bodyPr wrap="square" anchor="ctr" lIns="45720" rIns="45720">
+          <a:bodyPr wrap="square" lIns="45720" rIns="45720" anchor="ctr">
             <a:spAutoFit/>
           </a:bodyPr>
           <a:lstStyle/>
@@ -13147,6 +13326,7 @@
           <a:lstStyle/>
           <a:p>
             <a:pPr algn="ctr"/>
+            <a:endParaRPr/>
           </a:p>
         </p:txBody>
       </p:sp>
@@ -13167,7 +13347,7 @@
           <a:noFill/>
         </p:spPr>
         <p:txBody>
-          <a:bodyPr wrap="square" anchor="t" lIns="45720" rIns="45720">
+          <a:bodyPr wrap="square" lIns="45720" rIns="45720" anchor="t">
             <a:spAutoFit/>
           </a:bodyPr>
           <a:lstStyle/>
@@ -13214,7 +13394,7 @@
           <a:noFill/>
         </p:spPr>
         <p:txBody>
-          <a:bodyPr wrap="square" anchor="t" lIns="45720" rIns="45720">
+          <a:bodyPr wrap="square" lIns="45720" rIns="45720" anchor="t">
             <a:spAutoFit/>
           </a:bodyPr>
           <a:lstStyle/>
@@ -13285,6 +13465,7 @@
           <a:lstStyle/>
           <a:p>
             <a:pPr algn="ctr"/>
+            <a:endParaRPr/>
           </a:p>
         </p:txBody>
       </p:sp>
@@ -13305,7 +13486,7 @@
           <a:noFill/>
         </p:spPr>
         <p:txBody>
-          <a:bodyPr wrap="square" anchor="ctr" lIns="45720" rIns="45720">
+          <a:bodyPr wrap="square" lIns="45720" rIns="45720" anchor="ctr">
             <a:spAutoFit/>
           </a:bodyPr>
           <a:lstStyle/>
@@ -13364,6 +13545,7 @@
           <a:lstStyle/>
           <a:p>
             <a:pPr algn="ctr"/>
+            <a:endParaRPr/>
           </a:p>
         </p:txBody>
       </p:sp>
@@ -13384,7 +13566,7 @@
           <a:noFill/>
         </p:spPr>
         <p:txBody>
-          <a:bodyPr wrap="square" anchor="t" lIns="45720" rIns="45720">
+          <a:bodyPr wrap="square" lIns="45720" rIns="45720" anchor="t">
             <a:spAutoFit/>
           </a:bodyPr>
           <a:lstStyle/>
@@ -13431,7 +13613,7 @@
           <a:noFill/>
         </p:spPr>
         <p:txBody>
-          <a:bodyPr wrap="square" anchor="t" lIns="45720" rIns="45720">
+          <a:bodyPr wrap="square" lIns="45720" rIns="45720" anchor="t">
             <a:spAutoFit/>
           </a:bodyPr>
           <a:lstStyle/>
@@ -13502,6 +13684,7 @@
           <a:lstStyle/>
           <a:p>
             <a:pPr algn="ctr"/>
+            <a:endParaRPr/>
           </a:p>
         </p:txBody>
       </p:sp>
@@ -13522,7 +13705,7 @@
           <a:noFill/>
         </p:spPr>
         <p:txBody>
-          <a:bodyPr wrap="square" anchor="ctr" lIns="45720" rIns="45720">
+          <a:bodyPr wrap="square" lIns="45720" rIns="45720" anchor="ctr">
             <a:spAutoFit/>
           </a:bodyPr>
           <a:lstStyle/>
@@ -13581,6 +13764,7 @@
           <a:lstStyle/>
           <a:p>
             <a:pPr algn="ctr"/>
+            <a:endParaRPr/>
           </a:p>
         </p:txBody>
       </p:sp>
@@ -13601,7 +13785,7 @@
           <a:noFill/>
         </p:spPr>
         <p:txBody>
-          <a:bodyPr wrap="square" anchor="t" lIns="45720" rIns="45720">
+          <a:bodyPr wrap="square" lIns="45720" rIns="45720" anchor="t">
             <a:spAutoFit/>
           </a:bodyPr>
           <a:lstStyle/>
@@ -13636,7 +13820,7 @@
           <a:noFill/>
         </p:spPr>
         <p:txBody>
-          <a:bodyPr wrap="square" anchor="t" lIns="45720" rIns="45720">
+          <a:bodyPr wrap="square" lIns="45720" rIns="45720" anchor="t">
             <a:spAutoFit/>
           </a:bodyPr>
           <a:lstStyle/>
@@ -13683,7 +13867,7 @@
           <a:noFill/>
         </p:spPr>
         <p:txBody>
-          <a:bodyPr wrap="square" anchor="t" lIns="45720" rIns="45720">
+          <a:bodyPr wrap="square" lIns="45720" rIns="45720" anchor="t">
             <a:spAutoFit/>
           </a:bodyPr>
           <a:lstStyle/>
@@ -13718,7 +13902,7 @@
           <a:noFill/>
         </p:spPr>
         <p:txBody>
-          <a:bodyPr wrap="square" anchor="t" lIns="45720" rIns="45720">
+          <a:bodyPr wrap="square" lIns="45720" rIns="45720" anchor="t">
             <a:spAutoFit/>
           </a:bodyPr>
           <a:lstStyle/>
@@ -13745,7 +13929,7 @@
 </file>
 
 <file path=ppt/slides/slide5.xml><?xml version="1.0" encoding="utf-8"?>
-<p:sld xmlns:a="http://schemas.openxmlformats.org/drawingml/2006/main" xmlns:p="http://schemas.openxmlformats.org/presentationml/2006/main" xmlns:r="http://schemas.openxmlformats.org/officeDocument/2006/relationships">
+<p:sld xmlns:a="http://schemas.openxmlformats.org/drawingml/2006/main" xmlns:r="http://schemas.openxmlformats.org/officeDocument/2006/relationships" xmlns:p="http://schemas.openxmlformats.org/presentationml/2006/main">
   <p:cSld>
     <p:spTree>
       <p:nvGrpSpPr>
@@ -13753,7 +13937,14 @@
         <p:cNvGrpSpPr/>
         <p:nvPr/>
       </p:nvGrpSpPr>
-      <p:grpSpPr/>
+      <p:grpSpPr>
+        <a:xfrm>
+          <a:off x="0" y="0"/>
+          <a:ext cx="0" cy="0"/>
+          <a:chOff x="0" y="0"/>
+          <a:chExt cx="0" cy="0"/>
+        </a:xfrm>
+      </p:grpSpPr>
       <p:sp>
         <p:nvSpPr>
           <p:cNvPr id="2" name="Rectangle 1"/>
@@ -13795,6 +13986,7 @@
           <a:lstStyle/>
           <a:p>
             <a:pPr algn="ctr"/>
+            <a:endParaRPr/>
           </a:p>
         </p:txBody>
       </p:sp>
@@ -13815,7 +14007,7 @@
           <a:noFill/>
         </p:spPr>
         <p:txBody>
-          <a:bodyPr wrap="square" anchor="ctr" lIns="45720" rIns="45720">
+          <a:bodyPr wrap="square" lIns="45720" rIns="45720" anchor="ctr">
             <a:spAutoFit/>
           </a:bodyPr>
           <a:lstStyle/>
@@ -13874,6 +14066,7 @@
           <a:lstStyle/>
           <a:p>
             <a:pPr algn="ctr"/>
+            <a:endParaRPr/>
           </a:p>
         </p:txBody>
       </p:sp>
@@ -13918,6 +14111,7 @@
           <a:lstStyle/>
           <a:p>
             <a:pPr algn="ctr"/>
+            <a:endParaRPr/>
           </a:p>
         </p:txBody>
       </p:sp>
@@ -13938,7 +14132,7 @@
           <a:noFill/>
         </p:spPr>
         <p:txBody>
-          <a:bodyPr wrap="square" anchor="t" lIns="45720" rIns="45720">
+          <a:bodyPr wrap="square" lIns="45720" rIns="45720" anchor="t">
             <a:spAutoFit/>
           </a:bodyPr>
           <a:lstStyle/>
@@ -13997,6 +14191,7 @@
           <a:lstStyle/>
           <a:p>
             <a:pPr algn="ctr"/>
+            <a:endParaRPr/>
           </a:p>
         </p:txBody>
       </p:sp>
@@ -14017,7 +14212,7 @@
           <a:noFill/>
         </p:spPr>
         <p:txBody>
-          <a:bodyPr wrap="square" anchor="ctr" lIns="45720" rIns="45720">
+          <a:bodyPr wrap="square" lIns="45720" rIns="45720" anchor="ctr">
             <a:spAutoFit/>
           </a:bodyPr>
           <a:lstStyle/>
@@ -14088,6 +14283,7 @@
           <a:lstStyle/>
           <a:p>
             <a:pPr algn="ctr"/>
+            <a:endParaRPr/>
           </a:p>
         </p:txBody>
       </p:sp>
@@ -14108,7 +14304,7 @@
           <a:noFill/>
         </p:spPr>
         <p:txBody>
-          <a:bodyPr wrap="square" anchor="ctr" lIns="45720" rIns="45720">
+          <a:bodyPr wrap="square" lIns="45720" rIns="45720" anchor="ctr">
             <a:spAutoFit/>
           </a:bodyPr>
           <a:lstStyle/>
@@ -14167,6 +14363,7 @@
           <a:lstStyle/>
           <a:p>
             <a:pPr algn="ctr"/>
+            <a:endParaRPr/>
           </a:p>
         </p:txBody>
       </p:sp>
@@ -14187,7 +14384,7 @@
           <a:noFill/>
         </p:spPr>
         <p:txBody>
-          <a:bodyPr wrap="square" anchor="ctr" lIns="45720" rIns="45720">
+          <a:bodyPr wrap="square" lIns="45720" rIns="45720" anchor="ctr">
             <a:spAutoFit/>
           </a:bodyPr>
           <a:lstStyle/>
@@ -14246,6 +14443,7 @@
           <a:lstStyle/>
           <a:p>
             <a:pPr algn="ctr"/>
+            <a:endParaRPr/>
           </a:p>
         </p:txBody>
       </p:sp>
@@ -14266,7 +14464,7 @@
           <a:noFill/>
         </p:spPr>
         <p:txBody>
-          <a:bodyPr wrap="square" anchor="ctr" lIns="45720" rIns="45720">
+          <a:bodyPr wrap="square" lIns="45720" rIns="45720" anchor="ctr">
             <a:spAutoFit/>
           </a:bodyPr>
           <a:lstStyle/>
@@ -14325,6 +14523,7 @@
           <a:lstStyle/>
           <a:p>
             <a:pPr algn="ctr"/>
+            <a:endParaRPr/>
           </a:p>
         </p:txBody>
       </p:sp>
@@ -14345,7 +14544,7 @@
           <a:noFill/>
         </p:spPr>
         <p:txBody>
-          <a:bodyPr wrap="square" anchor="ctr" lIns="45720" rIns="45720">
+          <a:bodyPr wrap="square" lIns="45720" rIns="45720" anchor="ctr">
             <a:spAutoFit/>
           </a:bodyPr>
           <a:lstStyle/>
@@ -14404,6 +14603,7 @@
           <a:lstStyle/>
           <a:p>
             <a:pPr algn="ctr"/>
+            <a:endParaRPr/>
           </a:p>
         </p:txBody>
       </p:sp>
@@ -14424,7 +14624,7 @@
           <a:noFill/>
         </p:spPr>
         <p:txBody>
-          <a:bodyPr wrap="square" anchor="ctr" lIns="45720" rIns="45720">
+          <a:bodyPr wrap="square" lIns="45720" rIns="45720" anchor="ctr">
             <a:spAutoFit/>
           </a:bodyPr>
           <a:lstStyle/>
@@ -14483,6 +14683,7 @@
           <a:lstStyle/>
           <a:p>
             <a:pPr algn="ctr"/>
+            <a:endParaRPr/>
           </a:p>
         </p:txBody>
       </p:sp>
@@ -14503,7 +14704,7 @@
           <a:noFill/>
         </p:spPr>
         <p:txBody>
-          <a:bodyPr wrap="square" anchor="ctr" lIns="45720" rIns="45720">
+          <a:bodyPr wrap="square" lIns="45720" rIns="45720" anchor="ctr">
             <a:spAutoFit/>
           </a:bodyPr>
           <a:lstStyle/>
@@ -14562,6 +14763,7 @@
           <a:lstStyle/>
           <a:p>
             <a:pPr algn="ctr"/>
+            <a:endParaRPr/>
           </a:p>
         </p:txBody>
       </p:sp>
@@ -14582,7 +14784,7 @@
           <a:noFill/>
         </p:spPr>
         <p:txBody>
-          <a:bodyPr wrap="square" anchor="ctr" lIns="45720" rIns="45720">
+          <a:bodyPr wrap="square" lIns="45720" rIns="45720" anchor="ctr">
             <a:spAutoFit/>
           </a:bodyPr>
           <a:lstStyle/>
@@ -14617,7 +14819,7 @@
           <a:noFill/>
         </p:spPr>
         <p:txBody>
-          <a:bodyPr wrap="square" anchor="t" lIns="45720" rIns="45720">
+          <a:bodyPr wrap="square" lIns="45720" rIns="45720" anchor="t">
             <a:spAutoFit/>
           </a:bodyPr>
           <a:lstStyle/>
@@ -14652,7 +14854,7 @@
           <a:noFill/>
         </p:spPr>
         <p:txBody>
-          <a:bodyPr wrap="square" anchor="t" lIns="45720" rIns="45720">
+          <a:bodyPr wrap="square" lIns="45720" rIns="45720" anchor="t">
             <a:spAutoFit/>
           </a:bodyPr>
           <a:lstStyle/>
@@ -14687,7 +14889,7 @@
           <a:noFill/>
         </p:spPr>
         <p:txBody>
-          <a:bodyPr wrap="square" anchor="t" lIns="45720" rIns="45720">
+          <a:bodyPr wrap="square" lIns="45720" rIns="45720" anchor="t">
             <a:spAutoFit/>
           </a:bodyPr>
           <a:lstStyle/>
@@ -14722,7 +14924,7 @@
           <a:noFill/>
         </p:spPr>
         <p:txBody>
-          <a:bodyPr wrap="square" anchor="t" lIns="45720" rIns="45720">
+          <a:bodyPr wrap="square" lIns="45720" rIns="45720" anchor="t">
             <a:spAutoFit/>
           </a:bodyPr>
           <a:lstStyle/>
@@ -14757,7 +14959,7 @@
           <a:noFill/>
         </p:spPr>
         <p:txBody>
-          <a:bodyPr wrap="square" anchor="t" lIns="45720" rIns="45720">
+          <a:bodyPr wrap="square" lIns="45720" rIns="45720" anchor="t">
             <a:spAutoFit/>
           </a:bodyPr>
           <a:lstStyle/>
@@ -14792,7 +14994,7 @@
           <a:noFill/>
         </p:spPr>
         <p:txBody>
-          <a:bodyPr wrap="square" anchor="t" lIns="45720" rIns="45720">
+          <a:bodyPr wrap="square" lIns="45720" rIns="45720" anchor="t">
             <a:spAutoFit/>
           </a:bodyPr>
           <a:lstStyle/>
@@ -14827,7 +15029,7 @@
           <a:noFill/>
         </p:spPr>
         <p:txBody>
-          <a:bodyPr wrap="square" anchor="t" lIns="45720" rIns="45720">
+          <a:bodyPr wrap="square" lIns="45720" rIns="45720" anchor="t">
             <a:spAutoFit/>
           </a:bodyPr>
           <a:lstStyle/>
@@ -14862,7 +15064,7 @@
           <a:noFill/>
         </p:spPr>
         <p:txBody>
-          <a:bodyPr wrap="square" anchor="t" lIns="45720" rIns="45720">
+          <a:bodyPr wrap="square" lIns="45720" rIns="45720" anchor="t">
             <a:spAutoFit/>
           </a:bodyPr>
           <a:lstStyle/>
@@ -14897,7 +15099,7 @@
           <a:noFill/>
         </p:spPr>
         <p:txBody>
-          <a:bodyPr wrap="square" anchor="t" lIns="45720" rIns="45720">
+          <a:bodyPr wrap="square" lIns="45720" rIns="45720" anchor="t">
             <a:spAutoFit/>
           </a:bodyPr>
           <a:lstStyle/>
@@ -14932,7 +15134,7 @@
           <a:noFill/>
         </p:spPr>
         <p:txBody>
-          <a:bodyPr wrap="square" anchor="t" lIns="45720" rIns="45720">
+          <a:bodyPr wrap="square" lIns="45720" rIns="45720" anchor="t">
             <a:spAutoFit/>
           </a:bodyPr>
           <a:lstStyle/>
@@ -14967,7 +15169,7 @@
           <a:noFill/>
         </p:spPr>
         <p:txBody>
-          <a:bodyPr wrap="square" anchor="t" lIns="45720" rIns="45720">
+          <a:bodyPr wrap="square" lIns="45720" rIns="45720" anchor="t">
             <a:spAutoFit/>
           </a:bodyPr>
           <a:lstStyle/>
@@ -15002,7 +15204,7 @@
           <a:noFill/>
         </p:spPr>
         <p:txBody>
-          <a:bodyPr wrap="square" anchor="t" lIns="45720" rIns="45720">
+          <a:bodyPr wrap="square" lIns="45720" rIns="45720" anchor="t">
             <a:spAutoFit/>
           </a:bodyPr>
           <a:lstStyle/>
@@ -15029,7 +15231,7 @@
 </file>
 
 <file path=ppt/slides/slide6.xml><?xml version="1.0" encoding="utf-8"?>
-<p:sld xmlns:a="http://schemas.openxmlformats.org/drawingml/2006/main" xmlns:p="http://schemas.openxmlformats.org/presentationml/2006/main" xmlns:r="http://schemas.openxmlformats.org/officeDocument/2006/relationships">
+<p:sld xmlns:a="http://schemas.openxmlformats.org/drawingml/2006/main" xmlns:r="http://schemas.openxmlformats.org/officeDocument/2006/relationships" xmlns:p="http://schemas.openxmlformats.org/presentationml/2006/main">
   <p:cSld>
     <p:spTree>
       <p:nvGrpSpPr>
@@ -15037,7 +15239,14 @@
         <p:cNvGrpSpPr/>
         <p:nvPr/>
       </p:nvGrpSpPr>
-      <p:grpSpPr/>
+      <p:grpSpPr>
+        <a:xfrm>
+          <a:off x="0" y="0"/>
+          <a:ext cx="0" cy="0"/>
+          <a:chOff x="0" y="0"/>
+          <a:chExt cx="0" cy="0"/>
+        </a:xfrm>
+      </p:grpSpPr>
       <p:sp>
         <p:nvSpPr>
           <p:cNvPr id="2" name="Rectangle 1"/>
@@ -15079,6 +15288,7 @@
           <a:lstStyle/>
           <a:p>
             <a:pPr algn="ctr"/>
+            <a:endParaRPr/>
           </a:p>
         </p:txBody>
       </p:sp>
@@ -15099,7 +15309,7 @@
           <a:noFill/>
         </p:spPr>
         <p:txBody>
-          <a:bodyPr wrap="square" anchor="ctr" lIns="45720" rIns="45720">
+          <a:bodyPr wrap="square" lIns="45720" rIns="45720" anchor="ctr">
             <a:spAutoFit/>
           </a:bodyPr>
           <a:lstStyle/>
@@ -15158,6 +15368,7 @@
           <a:lstStyle/>
           <a:p>
             <a:pPr algn="ctr"/>
+            <a:endParaRPr/>
           </a:p>
         </p:txBody>
       </p:sp>
@@ -15202,6 +15413,7 @@
           <a:lstStyle/>
           <a:p>
             <a:pPr algn="ctr"/>
+            <a:endParaRPr/>
           </a:p>
         </p:txBody>
       </p:sp>
@@ -15246,6 +15458,7 @@
           <a:lstStyle/>
           <a:p>
             <a:pPr algn="ctr"/>
+            <a:endParaRPr/>
           </a:p>
         </p:txBody>
       </p:sp>
@@ -15266,7 +15479,7 @@
           <a:noFill/>
         </p:spPr>
         <p:txBody>
-          <a:bodyPr wrap="square" anchor="t" lIns="45720" rIns="45720">
+          <a:bodyPr wrap="square" lIns="45720" rIns="45720" anchor="t">
             <a:spAutoFit/>
           </a:bodyPr>
           <a:lstStyle/>
@@ -15301,7 +15514,7 @@
           <a:noFill/>
         </p:spPr>
         <p:txBody>
-          <a:bodyPr wrap="square" anchor="t" lIns="45720" rIns="45720">
+          <a:bodyPr wrap="square" lIns="45720" rIns="45720" anchor="t">
             <a:spAutoFit/>
           </a:bodyPr>
           <a:lstStyle/>
@@ -15336,7 +15549,7 @@
           <a:noFill/>
         </p:spPr>
         <p:txBody>
-          <a:bodyPr wrap="square" anchor="t" lIns="45720" rIns="45720">
+          <a:bodyPr wrap="square" lIns="45720" rIns="45720" anchor="t">
             <a:spAutoFit/>
           </a:bodyPr>
           <a:lstStyle/>
@@ -15395,6 +15608,7 @@
           <a:lstStyle/>
           <a:p>
             <a:pPr algn="ctr"/>
+            <a:endParaRPr/>
           </a:p>
         </p:txBody>
       </p:sp>
@@ -15439,6 +15653,7 @@
           <a:lstStyle/>
           <a:p>
             <a:pPr algn="ctr"/>
+            <a:endParaRPr/>
           </a:p>
         </p:txBody>
       </p:sp>
@@ -15459,7 +15674,7 @@
           <a:noFill/>
         </p:spPr>
         <p:txBody>
-          <a:bodyPr wrap="square" anchor="t" lIns="45720" rIns="45720">
+          <a:bodyPr wrap="square" lIns="45720" rIns="45720" anchor="t">
             <a:spAutoFit/>
           </a:bodyPr>
           <a:lstStyle/>
@@ -15494,7 +15709,7 @@
           <a:noFill/>
         </p:spPr>
         <p:txBody>
-          <a:bodyPr wrap="square" anchor="t" lIns="45720" rIns="45720">
+          <a:bodyPr wrap="square" lIns="45720" rIns="45720" anchor="t">
             <a:spAutoFit/>
           </a:bodyPr>
           <a:lstStyle/>
@@ -15529,7 +15744,7 @@
           <a:noFill/>
         </p:spPr>
         <p:txBody>
-          <a:bodyPr wrap="square" anchor="t" lIns="45720" rIns="45720">
+          <a:bodyPr wrap="square" lIns="45720" rIns="45720" anchor="t">
             <a:spAutoFit/>
           </a:bodyPr>
           <a:lstStyle/>
@@ -15588,6 +15803,7 @@
           <a:lstStyle/>
           <a:p>
             <a:pPr algn="ctr"/>
+            <a:endParaRPr/>
           </a:p>
         </p:txBody>
       </p:sp>
@@ -15632,6 +15848,7 @@
           <a:lstStyle/>
           <a:p>
             <a:pPr algn="ctr"/>
+            <a:endParaRPr/>
           </a:p>
         </p:txBody>
       </p:sp>
@@ -15652,7 +15869,7 @@
           <a:noFill/>
         </p:spPr>
         <p:txBody>
-          <a:bodyPr wrap="square" anchor="t" lIns="45720" rIns="45720">
+          <a:bodyPr wrap="square" lIns="45720" rIns="45720" anchor="t">
             <a:spAutoFit/>
           </a:bodyPr>
           <a:lstStyle/>
@@ -15687,7 +15904,7 @@
           <a:noFill/>
         </p:spPr>
         <p:txBody>
-          <a:bodyPr wrap="square" anchor="t" lIns="45720" rIns="45720">
+          <a:bodyPr wrap="square" lIns="45720" rIns="45720" anchor="t">
             <a:spAutoFit/>
           </a:bodyPr>
           <a:lstStyle/>
@@ -15722,7 +15939,7 @@
           <a:noFill/>
         </p:spPr>
         <p:txBody>
-          <a:bodyPr wrap="square" anchor="t" lIns="45720" rIns="45720">
+          <a:bodyPr wrap="square" lIns="45720" rIns="45720" anchor="t">
             <a:spAutoFit/>
           </a:bodyPr>
           <a:lstStyle/>
@@ -15781,6 +15998,7 @@
           <a:lstStyle/>
           <a:p>
             <a:pPr algn="ctr"/>
+            <a:endParaRPr/>
           </a:p>
         </p:txBody>
       </p:sp>
@@ -15825,6 +16043,7 @@
           <a:lstStyle/>
           <a:p>
             <a:pPr algn="ctr"/>
+            <a:endParaRPr/>
           </a:p>
         </p:txBody>
       </p:sp>
@@ -15845,7 +16064,7 @@
           <a:noFill/>
         </p:spPr>
         <p:txBody>
-          <a:bodyPr wrap="square" anchor="t" lIns="45720" rIns="45720">
+          <a:bodyPr wrap="square" lIns="45720" rIns="45720" anchor="t">
             <a:spAutoFit/>
           </a:bodyPr>
           <a:lstStyle/>
@@ -15880,7 +16099,7 @@
           <a:noFill/>
         </p:spPr>
         <p:txBody>
-          <a:bodyPr wrap="square" anchor="t" lIns="45720" rIns="45720">
+          <a:bodyPr wrap="square" lIns="45720" rIns="45720" anchor="t">
             <a:spAutoFit/>
           </a:bodyPr>
           <a:lstStyle/>
@@ -15915,7 +16134,7 @@
           <a:noFill/>
         </p:spPr>
         <p:txBody>
-          <a:bodyPr wrap="square" anchor="t" lIns="45720" rIns="45720">
+          <a:bodyPr wrap="square" lIns="45720" rIns="45720" anchor="t">
             <a:spAutoFit/>
           </a:bodyPr>
           <a:lstStyle/>
@@ -15974,6 +16193,7 @@
           <a:lstStyle/>
           <a:p>
             <a:pPr algn="ctr"/>
+            <a:endParaRPr/>
           </a:p>
         </p:txBody>
       </p:sp>
@@ -16018,6 +16238,7 @@
           <a:lstStyle/>
           <a:p>
             <a:pPr algn="ctr"/>
+            <a:endParaRPr/>
           </a:p>
         </p:txBody>
       </p:sp>
@@ -16038,7 +16259,7 @@
           <a:noFill/>
         </p:spPr>
         <p:txBody>
-          <a:bodyPr wrap="square" anchor="t" lIns="45720" rIns="45720">
+          <a:bodyPr wrap="square" lIns="45720" rIns="45720" anchor="t">
             <a:spAutoFit/>
           </a:bodyPr>
           <a:lstStyle/>
@@ -16073,7 +16294,7 @@
           <a:noFill/>
         </p:spPr>
         <p:txBody>
-          <a:bodyPr wrap="square" anchor="t" lIns="45720" rIns="45720">
+          <a:bodyPr wrap="square" lIns="45720" rIns="45720" anchor="t">
             <a:spAutoFit/>
           </a:bodyPr>
           <a:lstStyle/>
@@ -16108,7 +16329,7 @@
           <a:noFill/>
         </p:spPr>
         <p:txBody>
-          <a:bodyPr wrap="square" anchor="t" lIns="45720" rIns="45720">
+          <a:bodyPr wrap="square" lIns="45720" rIns="45720" anchor="t">
             <a:spAutoFit/>
           </a:bodyPr>
           <a:lstStyle/>
@@ -16167,6 +16388,7 @@
           <a:lstStyle/>
           <a:p>
             <a:pPr algn="ctr"/>
+            <a:endParaRPr/>
           </a:p>
         </p:txBody>
       </p:sp>
@@ -16211,6 +16433,7 @@
           <a:lstStyle/>
           <a:p>
             <a:pPr algn="ctr"/>
+            <a:endParaRPr/>
           </a:p>
         </p:txBody>
       </p:sp>
@@ -16231,7 +16454,7 @@
           <a:noFill/>
         </p:spPr>
         <p:txBody>
-          <a:bodyPr wrap="square" anchor="t" lIns="45720" rIns="45720">
+          <a:bodyPr wrap="square" lIns="45720" rIns="45720" anchor="t">
             <a:spAutoFit/>
           </a:bodyPr>
           <a:lstStyle/>
@@ -16266,7 +16489,7 @@
           <a:noFill/>
         </p:spPr>
         <p:txBody>
-          <a:bodyPr wrap="square" anchor="t" lIns="45720" rIns="45720">
+          <a:bodyPr wrap="square" lIns="45720" rIns="45720" anchor="t">
             <a:spAutoFit/>
           </a:bodyPr>
           <a:lstStyle/>
@@ -16301,7 +16524,7 @@
           <a:noFill/>
         </p:spPr>
         <p:txBody>
-          <a:bodyPr wrap="square" anchor="t" lIns="45720" rIns="45720">
+          <a:bodyPr wrap="square" lIns="45720" rIns="45720" anchor="t">
             <a:spAutoFit/>
           </a:bodyPr>
           <a:lstStyle/>
@@ -16360,6 +16583,7 @@
           <a:lstStyle/>
           <a:p>
             <a:pPr algn="ctr"/>
+            <a:endParaRPr/>
           </a:p>
         </p:txBody>
       </p:sp>
@@ -16404,6 +16628,7 @@
           <a:lstStyle/>
           <a:p>
             <a:pPr algn="ctr"/>
+            <a:endParaRPr/>
           </a:p>
         </p:txBody>
       </p:sp>
@@ -16424,7 +16649,7 @@
           <a:noFill/>
         </p:spPr>
         <p:txBody>
-          <a:bodyPr wrap="square" anchor="t" lIns="45720" rIns="45720">
+          <a:bodyPr wrap="square" lIns="45720" rIns="45720" anchor="t">
             <a:spAutoFit/>
           </a:bodyPr>
           <a:lstStyle/>
@@ -16459,7 +16684,7 @@
           <a:noFill/>
         </p:spPr>
         <p:txBody>
-          <a:bodyPr wrap="square" anchor="t" lIns="45720" rIns="45720">
+          <a:bodyPr wrap="square" lIns="45720" rIns="45720" anchor="t">
             <a:spAutoFit/>
           </a:bodyPr>
           <a:lstStyle/>
@@ -16494,7 +16719,7 @@
           <a:noFill/>
         </p:spPr>
         <p:txBody>
-          <a:bodyPr wrap="square" anchor="t" lIns="45720" rIns="45720">
+          <a:bodyPr wrap="square" lIns="45720" rIns="45720" anchor="t">
             <a:spAutoFit/>
           </a:bodyPr>
           <a:lstStyle/>
@@ -16553,6 +16778,7 @@
           <a:lstStyle/>
           <a:p>
             <a:pPr algn="ctr"/>
+            <a:endParaRPr/>
           </a:p>
         </p:txBody>
       </p:sp>
@@ -16597,6 +16823,7 @@
           <a:lstStyle/>
           <a:p>
             <a:pPr algn="ctr"/>
+            <a:endParaRPr/>
           </a:p>
         </p:txBody>
       </p:sp>
@@ -16617,7 +16844,7 @@
           <a:noFill/>
         </p:spPr>
         <p:txBody>
-          <a:bodyPr wrap="square" anchor="t" lIns="45720" rIns="45720">
+          <a:bodyPr wrap="square" lIns="45720" rIns="45720" anchor="t">
             <a:spAutoFit/>
           </a:bodyPr>
           <a:lstStyle/>
@@ -16652,7 +16879,7 @@
           <a:noFill/>
         </p:spPr>
         <p:txBody>
-          <a:bodyPr wrap="square" anchor="t" lIns="45720" rIns="45720">
+          <a:bodyPr wrap="square" lIns="45720" rIns="45720" anchor="t">
             <a:spAutoFit/>
           </a:bodyPr>
           <a:lstStyle/>
@@ -16687,7 +16914,7 @@
           <a:noFill/>
         </p:spPr>
         <p:txBody>
-          <a:bodyPr wrap="square" anchor="t" lIns="45720" rIns="45720">
+          <a:bodyPr wrap="square" lIns="45720" rIns="45720" anchor="t">
             <a:spAutoFit/>
           </a:bodyPr>
           <a:lstStyle/>
@@ -16722,7 +16949,7 @@
           <a:noFill/>
         </p:spPr>
         <p:txBody>
-          <a:bodyPr wrap="square" anchor="t" lIns="45720" rIns="45720">
+          <a:bodyPr wrap="square" lIns="45720" rIns="45720" anchor="t">
             <a:spAutoFit/>
           </a:bodyPr>
           <a:lstStyle/>
@@ -16749,7 +16976,7 @@
 </file>
 
 <file path=ppt/slides/slide7.xml><?xml version="1.0" encoding="utf-8"?>
-<p:sld xmlns:a="http://schemas.openxmlformats.org/drawingml/2006/main" xmlns:p="http://schemas.openxmlformats.org/presentationml/2006/main" xmlns:r="http://schemas.openxmlformats.org/officeDocument/2006/relationships">
+<p:sld xmlns:a="http://schemas.openxmlformats.org/drawingml/2006/main" xmlns:r="http://schemas.openxmlformats.org/officeDocument/2006/relationships" xmlns:p="http://schemas.openxmlformats.org/presentationml/2006/main">
   <p:cSld>
     <p:spTree>
       <p:nvGrpSpPr>
@@ -16757,7 +16984,14 @@
         <p:cNvGrpSpPr/>
         <p:nvPr/>
       </p:nvGrpSpPr>
-      <p:grpSpPr/>
+      <p:grpSpPr>
+        <a:xfrm>
+          <a:off x="0" y="0"/>
+          <a:ext cx="0" cy="0"/>
+          <a:chOff x="0" y="0"/>
+          <a:chExt cx="0" cy="0"/>
+        </a:xfrm>
+      </p:grpSpPr>
       <p:sp>
         <p:nvSpPr>
           <p:cNvPr id="2" name="Rectangle 1"/>
@@ -16799,6 +17033,7 @@
           <a:lstStyle/>
           <a:p>
             <a:pPr algn="ctr"/>
+            <a:endParaRPr/>
           </a:p>
         </p:txBody>
       </p:sp>
@@ -16819,7 +17054,7 @@
           <a:noFill/>
         </p:spPr>
         <p:txBody>
-          <a:bodyPr wrap="square" anchor="ctr" lIns="45720" rIns="45720">
+          <a:bodyPr wrap="square" lIns="45720" rIns="45720" anchor="ctr">
             <a:spAutoFit/>
           </a:bodyPr>
           <a:lstStyle/>
@@ -16878,6 +17113,7 @@
           <a:lstStyle/>
           <a:p>
             <a:pPr algn="ctr"/>
+            <a:endParaRPr/>
           </a:p>
         </p:txBody>
       </p:sp>
@@ -16898,7 +17134,7 @@
           <a:noFill/>
         </p:spPr>
         <p:txBody>
-          <a:bodyPr wrap="square" anchor="t" lIns="45720" rIns="45720">
+          <a:bodyPr wrap="square" lIns="45720" rIns="45720" anchor="t">
             <a:spAutoFit/>
           </a:bodyPr>
           <a:lstStyle/>
@@ -16957,6 +17193,7 @@
           <a:lstStyle/>
           <a:p>
             <a:pPr algn="ctr"/>
+            <a:endParaRPr/>
           </a:p>
         </p:txBody>
       </p:sp>
@@ -16977,7 +17214,7 @@
           <a:noFill/>
         </p:spPr>
         <p:txBody>
-          <a:bodyPr wrap="square" anchor="ctr" lIns="45720" rIns="45720">
+          <a:bodyPr wrap="square" lIns="45720" rIns="45720" anchor="ctr">
             <a:spAutoFit/>
           </a:bodyPr>
           <a:lstStyle/>
@@ -17036,6 +17273,7 @@
           <a:lstStyle/>
           <a:p>
             <a:pPr algn="ctr"/>
+            <a:endParaRPr/>
           </a:p>
         </p:txBody>
       </p:sp>
@@ -17056,7 +17294,7 @@
           <a:noFill/>
         </p:spPr>
         <p:txBody>
-          <a:bodyPr wrap="square" anchor="ctr" lIns="45720" rIns="45720">
+          <a:bodyPr wrap="square" lIns="45720" rIns="45720" anchor="ctr">
             <a:spAutoFit/>
           </a:bodyPr>
           <a:lstStyle/>
@@ -17115,6 +17353,7 @@
           <a:lstStyle/>
           <a:p>
             <a:pPr algn="ctr"/>
+            <a:endParaRPr/>
           </a:p>
         </p:txBody>
       </p:sp>
@@ -17135,7 +17374,7 @@
           <a:noFill/>
         </p:spPr>
         <p:txBody>
-          <a:bodyPr wrap="square" anchor="ctr" lIns="45720" rIns="45720">
+          <a:bodyPr wrap="square" lIns="45720" rIns="45720" anchor="ctr">
             <a:spAutoFit/>
           </a:bodyPr>
           <a:lstStyle/>
@@ -17194,6 +17433,7 @@
           <a:lstStyle/>
           <a:p>
             <a:pPr algn="ctr"/>
+            <a:endParaRPr/>
           </a:p>
         </p:txBody>
       </p:sp>
@@ -17214,7 +17454,7 @@
           <a:noFill/>
         </p:spPr>
         <p:txBody>
-          <a:bodyPr wrap="square" anchor="ctr" lIns="45720" rIns="45720">
+          <a:bodyPr wrap="square" lIns="45720" rIns="45720" anchor="ctr">
             <a:spAutoFit/>
           </a:bodyPr>
           <a:lstStyle/>
@@ -17273,6 +17513,7 @@
           <a:lstStyle/>
           <a:p>
             <a:pPr algn="ctr"/>
+            <a:endParaRPr/>
           </a:p>
         </p:txBody>
       </p:sp>
@@ -17293,7 +17534,7 @@
           <a:noFill/>
         </p:spPr>
         <p:txBody>
-          <a:bodyPr wrap="square" anchor="ctr" lIns="45720" rIns="45720">
+          <a:bodyPr wrap="square" lIns="45720" rIns="45720" anchor="ctr">
             <a:spAutoFit/>
           </a:bodyPr>
           <a:lstStyle/>
@@ -17352,6 +17593,7 @@
           <a:lstStyle/>
           <a:p>
             <a:pPr algn="ctr"/>
+            <a:endParaRPr/>
           </a:p>
         </p:txBody>
       </p:sp>
@@ -17372,7 +17614,7 @@
           <a:noFill/>
         </p:spPr>
         <p:txBody>
-          <a:bodyPr wrap="square" anchor="ctr" lIns="45720" rIns="45720">
+          <a:bodyPr wrap="square" lIns="45720" rIns="45720" anchor="ctr">
             <a:spAutoFit/>
           </a:bodyPr>
           <a:lstStyle/>
@@ -17407,7 +17649,7 @@
           <a:noFill/>
         </p:spPr>
         <p:txBody>
-          <a:bodyPr wrap="square" anchor="ctr" lIns="45720" rIns="45720">
+          <a:bodyPr wrap="square" lIns="45720" rIns="45720" anchor="ctr">
             <a:spAutoFit/>
           </a:bodyPr>
           <a:lstStyle/>
@@ -17442,7 +17684,7 @@
           <a:noFill/>
         </p:spPr>
         <p:txBody>
-          <a:bodyPr wrap="square" anchor="ctr" lIns="45720" rIns="45720">
+          <a:bodyPr wrap="square" lIns="45720" rIns="45720" anchor="ctr">
             <a:spAutoFit/>
           </a:bodyPr>
           <a:lstStyle/>
@@ -17477,7 +17719,7 @@
           <a:noFill/>
         </p:spPr>
         <p:txBody>
-          <a:bodyPr wrap="square" anchor="ctr" lIns="45720" rIns="45720">
+          <a:bodyPr wrap="square" lIns="45720" rIns="45720" anchor="ctr">
             <a:spAutoFit/>
           </a:bodyPr>
           <a:lstStyle/>
@@ -17512,7 +17754,7 @@
           <a:noFill/>
         </p:spPr>
         <p:txBody>
-          <a:bodyPr wrap="square" anchor="ctr" lIns="45720" rIns="45720">
+          <a:bodyPr wrap="square" lIns="45720" rIns="45720" anchor="ctr">
             <a:spAutoFit/>
           </a:bodyPr>
           <a:lstStyle/>
@@ -17571,6 +17813,7 @@
           <a:lstStyle/>
           <a:p>
             <a:pPr algn="ctr"/>
+            <a:endParaRPr/>
           </a:p>
         </p:txBody>
       </p:sp>
@@ -17591,7 +17834,7 @@
           <a:noFill/>
         </p:spPr>
         <p:txBody>
-          <a:bodyPr wrap="square" anchor="ctr" lIns="45720" rIns="45720">
+          <a:bodyPr wrap="square" lIns="45720" rIns="45720" anchor="ctr">
             <a:spAutoFit/>
           </a:bodyPr>
           <a:lstStyle/>
@@ -17626,7 +17869,7 @@
           <a:noFill/>
         </p:spPr>
         <p:txBody>
-          <a:bodyPr wrap="square" anchor="ctr" lIns="45720" rIns="45720">
+          <a:bodyPr wrap="square" lIns="45720" rIns="45720" anchor="ctr">
             <a:spAutoFit/>
           </a:bodyPr>
           <a:lstStyle/>
@@ -17661,7 +17904,7 @@
           <a:noFill/>
         </p:spPr>
         <p:txBody>
-          <a:bodyPr wrap="square" anchor="ctr" lIns="45720" rIns="45720">
+          <a:bodyPr wrap="square" lIns="45720" rIns="45720" anchor="ctr">
             <a:spAutoFit/>
           </a:bodyPr>
           <a:lstStyle/>
@@ -17696,7 +17939,7 @@
           <a:noFill/>
         </p:spPr>
         <p:txBody>
-          <a:bodyPr wrap="square" anchor="ctr" lIns="45720" rIns="45720">
+          <a:bodyPr wrap="square" lIns="45720" rIns="45720" anchor="ctr">
             <a:spAutoFit/>
           </a:bodyPr>
           <a:lstStyle/>
@@ -17731,7 +17974,7 @@
           <a:noFill/>
         </p:spPr>
         <p:txBody>
-          <a:bodyPr wrap="square" anchor="ctr" lIns="45720" rIns="45720">
+          <a:bodyPr wrap="square" lIns="45720" rIns="45720" anchor="ctr">
             <a:spAutoFit/>
           </a:bodyPr>
           <a:lstStyle/>
@@ -17790,6 +18033,7 @@
           <a:lstStyle/>
           <a:p>
             <a:pPr algn="ctr"/>
+            <a:endParaRPr/>
           </a:p>
         </p:txBody>
       </p:sp>
@@ -17810,7 +18054,7 @@
           <a:noFill/>
         </p:spPr>
         <p:txBody>
-          <a:bodyPr wrap="square" anchor="ctr" lIns="45720" rIns="45720">
+          <a:bodyPr wrap="square" lIns="45720" rIns="45720" anchor="ctr">
             <a:spAutoFit/>
           </a:bodyPr>
           <a:lstStyle/>
@@ -17845,7 +18089,7 @@
           <a:noFill/>
         </p:spPr>
         <p:txBody>
-          <a:bodyPr wrap="square" anchor="ctr" lIns="45720" rIns="45720">
+          <a:bodyPr wrap="square" lIns="45720" rIns="45720" anchor="ctr">
             <a:spAutoFit/>
           </a:bodyPr>
           <a:lstStyle/>
@@ -17880,7 +18124,7 @@
           <a:noFill/>
         </p:spPr>
         <p:txBody>
-          <a:bodyPr wrap="square" anchor="ctr" lIns="45720" rIns="45720">
+          <a:bodyPr wrap="square" lIns="45720" rIns="45720" anchor="ctr">
             <a:spAutoFit/>
           </a:bodyPr>
           <a:lstStyle/>
@@ -17915,7 +18159,7 @@
           <a:noFill/>
         </p:spPr>
         <p:txBody>
-          <a:bodyPr wrap="square" anchor="ctr" lIns="45720" rIns="45720">
+          <a:bodyPr wrap="square" lIns="45720" rIns="45720" anchor="ctr">
             <a:spAutoFit/>
           </a:bodyPr>
           <a:lstStyle/>
@@ -17950,7 +18194,7 @@
           <a:noFill/>
         </p:spPr>
         <p:txBody>
-          <a:bodyPr wrap="square" anchor="ctr" lIns="45720" rIns="45720">
+          <a:bodyPr wrap="square" lIns="45720" rIns="45720" anchor="ctr">
             <a:spAutoFit/>
           </a:bodyPr>
           <a:lstStyle/>
@@ -18009,6 +18253,7 @@
           <a:lstStyle/>
           <a:p>
             <a:pPr algn="ctr"/>
+            <a:endParaRPr/>
           </a:p>
         </p:txBody>
       </p:sp>
@@ -18029,7 +18274,7 @@
           <a:noFill/>
         </p:spPr>
         <p:txBody>
-          <a:bodyPr wrap="square" anchor="ctr" lIns="45720" rIns="45720">
+          <a:bodyPr wrap="square" lIns="45720" rIns="45720" anchor="ctr">
             <a:spAutoFit/>
           </a:bodyPr>
           <a:lstStyle/>
@@ -18064,7 +18309,7 @@
           <a:noFill/>
         </p:spPr>
         <p:txBody>
-          <a:bodyPr wrap="square" anchor="ctr" lIns="45720" rIns="45720">
+          <a:bodyPr wrap="square" lIns="45720" rIns="45720" anchor="ctr">
             <a:spAutoFit/>
           </a:bodyPr>
           <a:lstStyle/>
@@ -18099,7 +18344,7 @@
           <a:noFill/>
         </p:spPr>
         <p:txBody>
-          <a:bodyPr wrap="square" anchor="ctr" lIns="45720" rIns="45720">
+          <a:bodyPr wrap="square" lIns="45720" rIns="45720" anchor="ctr">
             <a:spAutoFit/>
           </a:bodyPr>
           <a:lstStyle/>
@@ -18134,7 +18379,7 @@
           <a:noFill/>
         </p:spPr>
         <p:txBody>
-          <a:bodyPr wrap="square" anchor="ctr" lIns="45720" rIns="45720">
+          <a:bodyPr wrap="square" lIns="45720" rIns="45720" anchor="ctr">
             <a:spAutoFit/>
           </a:bodyPr>
           <a:lstStyle/>
@@ -18169,7 +18414,7 @@
           <a:noFill/>
         </p:spPr>
         <p:txBody>
-          <a:bodyPr wrap="square" anchor="ctr" lIns="45720" rIns="45720">
+          <a:bodyPr wrap="square" lIns="45720" rIns="45720" anchor="ctr">
             <a:spAutoFit/>
           </a:bodyPr>
           <a:lstStyle/>
@@ -18228,6 +18473,7 @@
           <a:lstStyle/>
           <a:p>
             <a:pPr algn="ctr"/>
+            <a:endParaRPr/>
           </a:p>
         </p:txBody>
       </p:sp>
@@ -18248,7 +18494,7 @@
           <a:noFill/>
         </p:spPr>
         <p:txBody>
-          <a:bodyPr wrap="square" anchor="ctr" lIns="45720" rIns="45720">
+          <a:bodyPr wrap="square" lIns="45720" rIns="45720" anchor="ctr">
             <a:spAutoFit/>
           </a:bodyPr>
           <a:lstStyle/>
@@ -18283,7 +18529,7 @@
           <a:noFill/>
         </p:spPr>
         <p:txBody>
-          <a:bodyPr wrap="square" anchor="ctr" lIns="45720" rIns="45720">
+          <a:bodyPr wrap="square" lIns="45720" rIns="45720" anchor="ctr">
             <a:spAutoFit/>
           </a:bodyPr>
           <a:lstStyle/>
@@ -18318,7 +18564,7 @@
           <a:noFill/>
         </p:spPr>
         <p:txBody>
-          <a:bodyPr wrap="square" anchor="ctr" lIns="45720" rIns="45720">
+          <a:bodyPr wrap="square" lIns="45720" rIns="45720" anchor="ctr">
             <a:spAutoFit/>
           </a:bodyPr>
           <a:lstStyle/>
@@ -18353,7 +18599,7 @@
           <a:noFill/>
         </p:spPr>
         <p:txBody>
-          <a:bodyPr wrap="square" anchor="ctr" lIns="45720" rIns="45720">
+          <a:bodyPr wrap="square" lIns="45720" rIns="45720" anchor="ctr">
             <a:spAutoFit/>
           </a:bodyPr>
           <a:lstStyle/>
@@ -18388,7 +18634,7 @@
           <a:noFill/>
         </p:spPr>
         <p:txBody>
-          <a:bodyPr wrap="square" anchor="ctr" lIns="45720" rIns="45720">
+          <a:bodyPr wrap="square" lIns="45720" rIns="45720" anchor="ctr">
             <a:spAutoFit/>
           </a:bodyPr>
           <a:lstStyle/>
@@ -18447,6 +18693,7 @@
           <a:lstStyle/>
           <a:p>
             <a:pPr algn="ctr"/>
+            <a:endParaRPr/>
           </a:p>
         </p:txBody>
       </p:sp>
@@ -18467,7 +18714,7 @@
           <a:noFill/>
         </p:spPr>
         <p:txBody>
-          <a:bodyPr wrap="square" anchor="t" lIns="45720" rIns="45720">
+          <a:bodyPr wrap="square" lIns="45720" rIns="45720" anchor="t">
             <a:spAutoFit/>
           </a:bodyPr>
           <a:lstStyle/>
@@ -18502,7 +18749,7 @@
           <a:noFill/>
         </p:spPr>
         <p:txBody>
-          <a:bodyPr wrap="square" anchor="t" lIns="45720" rIns="45720">
+          <a:bodyPr wrap="square" lIns="45720" rIns="45720" anchor="t">
             <a:spAutoFit/>
           </a:bodyPr>
           <a:lstStyle/>
@@ -18537,7 +18784,7 @@
           <a:noFill/>
         </p:spPr>
         <p:txBody>
-          <a:bodyPr wrap="square" anchor="t" lIns="45720" rIns="45720">
+          <a:bodyPr wrap="square" lIns="45720" rIns="45720" anchor="t">
             <a:spAutoFit/>
           </a:bodyPr>
           <a:lstStyle/>
@@ -18564,7 +18811,7 @@
 </file>
 
 <file path=ppt/slides/slide8.xml><?xml version="1.0" encoding="utf-8"?>
-<p:sld xmlns:a="http://schemas.openxmlformats.org/drawingml/2006/main" xmlns:p="http://schemas.openxmlformats.org/presentationml/2006/main" xmlns:r="http://schemas.openxmlformats.org/officeDocument/2006/relationships">
+<p:sld xmlns:a="http://schemas.openxmlformats.org/drawingml/2006/main" xmlns:r="http://schemas.openxmlformats.org/officeDocument/2006/relationships" xmlns:p="http://schemas.openxmlformats.org/presentationml/2006/main">
   <p:cSld>
     <p:spTree>
       <p:nvGrpSpPr>
@@ -18572,7 +18819,14 @@
         <p:cNvGrpSpPr/>
         <p:nvPr/>
       </p:nvGrpSpPr>
-      <p:grpSpPr/>
+      <p:grpSpPr>
+        <a:xfrm>
+          <a:off x="0" y="0"/>
+          <a:ext cx="0" cy="0"/>
+          <a:chOff x="0" y="0"/>
+          <a:chExt cx="0" cy="0"/>
+        </a:xfrm>
+      </p:grpSpPr>
       <p:sp>
         <p:nvSpPr>
           <p:cNvPr id="2" name="Rectangle 1"/>
@@ -18614,6 +18868,7 @@
           <a:lstStyle/>
           <a:p>
             <a:pPr algn="ctr"/>
+            <a:endParaRPr/>
           </a:p>
         </p:txBody>
       </p:sp>
@@ -18634,7 +18889,7 @@
           <a:noFill/>
         </p:spPr>
         <p:txBody>
-          <a:bodyPr wrap="square" anchor="ctr" lIns="45720" rIns="45720">
+          <a:bodyPr wrap="square" lIns="45720" rIns="45720" anchor="ctr">
             <a:spAutoFit/>
           </a:bodyPr>
           <a:lstStyle/>
@@ -18693,6 +18948,7 @@
           <a:lstStyle/>
           <a:p>
             <a:pPr algn="ctr"/>
+            <a:endParaRPr/>
           </a:p>
         </p:txBody>
       </p:sp>
@@ -18809,7 +19065,7 @@
           <a:noFill/>
         </p:spPr>
         <p:txBody>
-          <a:bodyPr wrap="square" anchor="t" lIns="45720" rIns="45720">
+          <a:bodyPr wrap="square" lIns="45720" rIns="45720" anchor="t">
             <a:spAutoFit/>
           </a:bodyPr>
           <a:lstStyle/>
@@ -18836,7 +19092,7 @@
 </file>
 
 <file path=ppt/slides/slide9.xml><?xml version="1.0" encoding="utf-8"?>
-<p:sld xmlns:a="http://schemas.openxmlformats.org/drawingml/2006/main" xmlns:p="http://schemas.openxmlformats.org/presentationml/2006/main" xmlns:r="http://schemas.openxmlformats.org/officeDocument/2006/relationships">
+<p:sld xmlns:a="http://schemas.openxmlformats.org/drawingml/2006/main" xmlns:r="http://schemas.openxmlformats.org/officeDocument/2006/relationships" xmlns:p="http://schemas.openxmlformats.org/presentationml/2006/main">
   <p:cSld>
     <p:spTree>
       <p:nvGrpSpPr>
@@ -18844,7 +19100,14 @@
         <p:cNvGrpSpPr/>
         <p:nvPr/>
       </p:nvGrpSpPr>
-      <p:grpSpPr/>
+      <p:grpSpPr>
+        <a:xfrm>
+          <a:off x="0" y="0"/>
+          <a:ext cx="0" cy="0"/>
+          <a:chOff x="0" y="0"/>
+          <a:chExt cx="0" cy="0"/>
+        </a:xfrm>
+      </p:grpSpPr>
       <p:sp>
         <p:nvSpPr>
           <p:cNvPr id="2" name="Rectangle 1"/>
@@ -18886,6 +19149,7 @@
           <a:lstStyle/>
           <a:p>
             <a:pPr algn="ctr"/>
+            <a:endParaRPr/>
           </a:p>
         </p:txBody>
       </p:sp>
@@ -18906,7 +19170,7 @@
           <a:noFill/>
         </p:spPr>
         <p:txBody>
-          <a:bodyPr wrap="square" anchor="ctr" lIns="45720" rIns="45720">
+          <a:bodyPr wrap="square" lIns="45720" rIns="45720" anchor="ctr">
             <a:spAutoFit/>
           </a:bodyPr>
           <a:lstStyle/>
@@ -18965,6 +19229,7 @@
           <a:lstStyle/>
           <a:p>
             <a:pPr algn="ctr"/>
+            <a:endParaRPr/>
           </a:p>
         </p:txBody>
       </p:sp>
@@ -19009,6 +19274,7 @@
           <a:lstStyle/>
           <a:p>
             <a:pPr algn="ctr"/>
+            <a:endParaRPr/>
           </a:p>
         </p:txBody>
       </p:sp>
@@ -19029,7 +19295,7 @@
           <a:noFill/>
         </p:spPr>
         <p:txBody>
-          <a:bodyPr wrap="square" anchor="ctr" lIns="45720" rIns="45720">
+          <a:bodyPr wrap="square" lIns="45720" rIns="45720" anchor="ctr">
             <a:spAutoFit/>
           </a:bodyPr>
           <a:lstStyle/>
@@ -19088,6 +19354,7 @@
           <a:lstStyle/>
           <a:p>
             <a:pPr algn="ctr"/>
+            <a:endParaRPr/>
           </a:p>
         </p:txBody>
       </p:sp>
@@ -19108,7 +19375,7 @@
           <a:noFill/>
         </p:spPr>
         <p:txBody>
-          <a:bodyPr wrap="square" anchor="t" lIns="45720" rIns="45720">
+          <a:bodyPr wrap="square" lIns="45720" rIns="45720" anchor="t">
             <a:spAutoFit/>
           </a:bodyPr>
           <a:lstStyle/>
@@ -19143,7 +19410,7 @@
           <a:noFill/>
         </p:spPr>
         <p:txBody>
-          <a:bodyPr wrap="square" anchor="t" lIns="45720" rIns="45720">
+          <a:bodyPr wrap="square" lIns="45720" rIns="45720" anchor="t">
             <a:spAutoFit/>
           </a:bodyPr>
           <a:lstStyle/>
@@ -19178,7 +19445,7 @@
           <a:noFill/>
         </p:spPr>
         <p:txBody>
-          <a:bodyPr wrap="square" anchor="t" lIns="45720" rIns="45720">
+          <a:bodyPr wrap="square" lIns="45720" rIns="45720" anchor="t">
             <a:spAutoFit/>
           </a:bodyPr>
           <a:lstStyle/>
@@ -19237,6 +19504,7 @@
           <a:lstStyle/>
           <a:p>
             <a:pPr algn="ctr"/>
+            <a:endParaRPr/>
           </a:p>
         </p:txBody>
       </p:sp>
@@ -19257,7 +19525,7 @@
           <a:noFill/>
         </p:spPr>
         <p:txBody>
-          <a:bodyPr wrap="square" anchor="ctr" lIns="45720" rIns="45720">
+          <a:bodyPr wrap="square" lIns="45720" rIns="45720" anchor="ctr">
             <a:spAutoFit/>
           </a:bodyPr>
           <a:lstStyle/>
@@ -19316,6 +19584,7 @@
           <a:lstStyle/>
           <a:p>
             <a:pPr algn="ctr"/>
+            <a:endParaRPr/>
           </a:p>
         </p:txBody>
       </p:sp>
@@ -19336,7 +19605,7 @@
           <a:noFill/>
         </p:spPr>
         <p:txBody>
-          <a:bodyPr wrap="square" anchor="t" lIns="45720" rIns="45720">
+          <a:bodyPr wrap="square" lIns="45720" rIns="45720" anchor="t">
             <a:spAutoFit/>
           </a:bodyPr>
           <a:lstStyle/>
@@ -19371,7 +19640,7 @@
           <a:noFill/>
         </p:spPr>
         <p:txBody>
-          <a:bodyPr wrap="square" anchor="t" lIns="45720" rIns="45720">
+          <a:bodyPr wrap="square" lIns="45720" rIns="45720" anchor="t">
             <a:spAutoFit/>
           </a:bodyPr>
           <a:lstStyle/>
@@ -19406,7 +19675,7 @@
           <a:noFill/>
         </p:spPr>
         <p:txBody>
-          <a:bodyPr wrap="square" anchor="t" lIns="45720" rIns="45720">
+          <a:bodyPr wrap="square" lIns="45720" rIns="45720" anchor="t">
             <a:spAutoFit/>
           </a:bodyPr>
           <a:lstStyle/>
@@ -19465,6 +19734,7 @@
           <a:lstStyle/>
           <a:p>
             <a:pPr algn="ctr"/>
+            <a:endParaRPr/>
           </a:p>
         </p:txBody>
       </p:sp>
@@ -19485,7 +19755,7 @@
           <a:noFill/>
         </p:spPr>
         <p:txBody>
-          <a:bodyPr wrap="square" anchor="ctr" lIns="45720" rIns="45720">
+          <a:bodyPr wrap="square" lIns="45720" rIns="45720" anchor="ctr">
             <a:spAutoFit/>
           </a:bodyPr>
           <a:lstStyle/>
@@ -19544,6 +19814,7 @@
           <a:lstStyle/>
           <a:p>
             <a:pPr algn="ctr"/>
+            <a:endParaRPr/>
           </a:p>
         </p:txBody>
       </p:sp>
@@ -19564,7 +19835,7 @@
           <a:noFill/>
         </p:spPr>
         <p:txBody>
-          <a:bodyPr wrap="square" anchor="t" lIns="45720" rIns="45720">
+          <a:bodyPr wrap="square" lIns="45720" rIns="45720" anchor="t">
             <a:spAutoFit/>
           </a:bodyPr>
           <a:lstStyle/>
@@ -19599,7 +19870,7 @@
           <a:noFill/>
         </p:spPr>
         <p:txBody>
-          <a:bodyPr wrap="square" anchor="t" lIns="45720" rIns="45720">
+          <a:bodyPr wrap="square" lIns="45720" rIns="45720" anchor="t">
             <a:spAutoFit/>
           </a:bodyPr>
           <a:lstStyle/>
@@ -19634,7 +19905,7 @@
           <a:noFill/>
         </p:spPr>
         <p:txBody>
-          <a:bodyPr wrap="square" anchor="t" lIns="45720" rIns="45720">
+          <a:bodyPr wrap="square" lIns="45720" rIns="45720" anchor="t">
             <a:spAutoFit/>
           </a:bodyPr>
           <a:lstStyle/>
@@ -19693,6 +19964,7 @@
           <a:lstStyle/>
           <a:p>
             <a:pPr algn="ctr"/>
+            <a:endParaRPr/>
           </a:p>
         </p:txBody>
       </p:sp>
@@ -19713,7 +19985,7 @@
           <a:noFill/>
         </p:spPr>
         <p:txBody>
-          <a:bodyPr wrap="square" anchor="t" lIns="45720" rIns="45720">
+          <a:bodyPr wrap="square" lIns="45720" rIns="45720" anchor="t">
             <a:spAutoFit/>
           </a:bodyPr>
           <a:lstStyle/>
@@ -19748,7 +20020,7 @@
           <a:noFill/>
         </p:spPr>
         <p:txBody>
-          <a:bodyPr wrap="square" anchor="t" lIns="45720" rIns="45720">
+          <a:bodyPr wrap="square" lIns="45720" rIns="45720" anchor="t">
             <a:spAutoFit/>
           </a:bodyPr>
           <a:lstStyle/>
@@ -19783,7 +20055,7 @@
           <a:noFill/>
         </p:spPr>
         <p:txBody>
-          <a:bodyPr wrap="square" anchor="t" lIns="45720" rIns="45720">
+          <a:bodyPr wrap="square" lIns="45720" rIns="45720" anchor="t">
             <a:spAutoFit/>
           </a:bodyPr>
           <a:lstStyle/>
